--- a/Docs/모으미_moz.A.I.c_기획서 이미지 슬라이드.docx.pptx
+++ b/Docs/모으미_moz.A.I.c_기획서 이미지 슬라이드.docx.pptx
@@ -5,9 +5,13 @@
     <p:sldMasterId id="2147483648" r:id="rId1"/>
   </p:sldMasterIdLst>
   <p:sldIdLst>
-    <p:sldId id="257" r:id="rId2"/>
-    <p:sldId id="258" r:id="rId3"/>
-    <p:sldId id="256" r:id="rId4"/>
+    <p:sldId id="259" r:id="rId2"/>
+    <p:sldId id="257" r:id="rId3"/>
+    <p:sldId id="258" r:id="rId4"/>
+    <p:sldId id="256" r:id="rId5"/>
+    <p:sldId id="260" r:id="rId6"/>
+    <p:sldId id="261" r:id="rId7"/>
+    <p:sldId id="262" r:id="rId8"/>
   </p:sldIdLst>
   <p:sldSz cx="12192000" cy="6858000"/>
   <p:notesSz cx="6858000" cy="9144000"/>
@@ -261,7 +265,7 @@
           <a:p>
             <a:fld id="{EDD790CF-EE62-431F-953E-416807FC812B}" type="datetimeFigureOut">
               <a:rPr lang="ko-KR" altLang="en-US" smtClean="0"/>
-              <a:t>2026-03-16</a:t>
+              <a:t>2026-03-23</a:t>
             </a:fld>
             <a:endParaRPr lang="ko-KR" altLang="en-US"/>
           </a:p>
@@ -459,7 +463,7 @@
           <a:p>
             <a:fld id="{EDD790CF-EE62-431F-953E-416807FC812B}" type="datetimeFigureOut">
               <a:rPr lang="ko-KR" altLang="en-US" smtClean="0"/>
-              <a:t>2026-03-16</a:t>
+              <a:t>2026-03-23</a:t>
             </a:fld>
             <a:endParaRPr lang="ko-KR" altLang="en-US"/>
           </a:p>
@@ -667,7 +671,7 @@
           <a:p>
             <a:fld id="{EDD790CF-EE62-431F-953E-416807FC812B}" type="datetimeFigureOut">
               <a:rPr lang="ko-KR" altLang="en-US" smtClean="0"/>
-              <a:t>2026-03-16</a:t>
+              <a:t>2026-03-23</a:t>
             </a:fld>
             <a:endParaRPr lang="ko-KR" altLang="en-US"/>
           </a:p>
@@ -865,7 +869,7 @@
           <a:p>
             <a:fld id="{EDD790CF-EE62-431F-953E-416807FC812B}" type="datetimeFigureOut">
               <a:rPr lang="ko-KR" altLang="en-US" smtClean="0"/>
-              <a:t>2026-03-16</a:t>
+              <a:t>2026-03-23</a:t>
             </a:fld>
             <a:endParaRPr lang="ko-KR" altLang="en-US"/>
           </a:p>
@@ -1140,7 +1144,7 @@
           <a:p>
             <a:fld id="{EDD790CF-EE62-431F-953E-416807FC812B}" type="datetimeFigureOut">
               <a:rPr lang="ko-KR" altLang="en-US" smtClean="0"/>
-              <a:t>2026-03-16</a:t>
+              <a:t>2026-03-23</a:t>
             </a:fld>
             <a:endParaRPr lang="ko-KR" altLang="en-US"/>
           </a:p>
@@ -1405,7 +1409,7 @@
           <a:p>
             <a:fld id="{EDD790CF-EE62-431F-953E-416807FC812B}" type="datetimeFigureOut">
               <a:rPr lang="ko-KR" altLang="en-US" smtClean="0"/>
-              <a:t>2026-03-16</a:t>
+              <a:t>2026-03-23</a:t>
             </a:fld>
             <a:endParaRPr lang="ko-KR" altLang="en-US"/>
           </a:p>
@@ -1817,7 +1821,7 @@
           <a:p>
             <a:fld id="{EDD790CF-EE62-431F-953E-416807FC812B}" type="datetimeFigureOut">
               <a:rPr lang="ko-KR" altLang="en-US" smtClean="0"/>
-              <a:t>2026-03-16</a:t>
+              <a:t>2026-03-23</a:t>
             </a:fld>
             <a:endParaRPr lang="ko-KR" altLang="en-US"/>
           </a:p>
@@ -1958,7 +1962,7 @@
           <a:p>
             <a:fld id="{EDD790CF-EE62-431F-953E-416807FC812B}" type="datetimeFigureOut">
               <a:rPr lang="ko-KR" altLang="en-US" smtClean="0"/>
-              <a:t>2026-03-16</a:t>
+              <a:t>2026-03-23</a:t>
             </a:fld>
             <a:endParaRPr lang="ko-KR" altLang="en-US"/>
           </a:p>
@@ -2071,7 +2075,7 @@
           <a:p>
             <a:fld id="{EDD790CF-EE62-431F-953E-416807FC812B}" type="datetimeFigureOut">
               <a:rPr lang="ko-KR" altLang="en-US" smtClean="0"/>
-              <a:t>2026-03-16</a:t>
+              <a:t>2026-03-23</a:t>
             </a:fld>
             <a:endParaRPr lang="ko-KR" altLang="en-US"/>
           </a:p>
@@ -2382,7 +2386,7 @@
           <a:p>
             <a:fld id="{EDD790CF-EE62-431F-953E-416807FC812B}" type="datetimeFigureOut">
               <a:rPr lang="ko-KR" altLang="en-US" smtClean="0"/>
-              <a:t>2026-03-16</a:t>
+              <a:t>2026-03-23</a:t>
             </a:fld>
             <a:endParaRPr lang="ko-KR" altLang="en-US"/>
           </a:p>
@@ -2670,7 +2674,7 @@
           <a:p>
             <a:fld id="{EDD790CF-EE62-431F-953E-416807FC812B}" type="datetimeFigureOut">
               <a:rPr lang="ko-KR" altLang="en-US" smtClean="0"/>
-              <a:t>2026-03-16</a:t>
+              <a:t>2026-03-23</a:t>
             </a:fld>
             <a:endParaRPr lang="ko-KR" altLang="en-US"/>
           </a:p>
@@ -2911,7 +2915,7 @@
           <a:p>
             <a:fld id="{EDD790CF-EE62-431F-953E-416807FC812B}" type="datetimeFigureOut">
               <a:rPr lang="ko-KR" altLang="en-US" smtClean="0"/>
-              <a:t>2026-03-16</a:t>
+              <a:t>2026-03-23</a:t>
             </a:fld>
             <a:endParaRPr lang="ko-KR" altLang="en-US"/>
           </a:p>
@@ -3328,6 +3332,773 @@
           <a:chExt cx="0" cy="0"/>
         </a:xfrm>
       </p:grpSpPr>
+      <p:sp>
+        <p:nvSpPr>
+          <p:cNvPr id="14" name="직사각형 13">
+            <a:extLst>
+              <a:ext uri="{FF2B5EF4-FFF2-40B4-BE49-F238E27FC236}">
+                <a16:creationId xmlns:a16="http://schemas.microsoft.com/office/drawing/2014/main" id="{A4E96237-F9E7-4125-B9C9-46CA92851359}"/>
+              </a:ext>
+            </a:extLst>
+          </p:cNvPr>
+          <p:cNvSpPr/>
+          <p:nvPr/>
+        </p:nvSpPr>
+        <p:spPr>
+          <a:xfrm>
+            <a:off x="2446866" y="967419"/>
+            <a:ext cx="5184000" cy="4320000"/>
+          </a:xfrm>
+          <a:prstGeom prst="rect">
+            <a:avLst/>
+          </a:prstGeom>
+          <a:solidFill>
+            <a:schemeClr val="bg1"/>
+          </a:solidFill>
+          <a:ln>
+            <a:solidFill>
+              <a:srgbClr val="00B0F0"/>
+            </a:solidFill>
+          </a:ln>
+        </p:spPr>
+        <p:style>
+          <a:lnRef idx="2">
+            <a:schemeClr val="accent1">
+              <a:shade val="50000"/>
+            </a:schemeClr>
+          </a:lnRef>
+          <a:fillRef idx="1">
+            <a:schemeClr val="accent1"/>
+          </a:fillRef>
+          <a:effectRef idx="0">
+            <a:schemeClr val="accent1"/>
+          </a:effectRef>
+          <a:fontRef idx="minor">
+            <a:schemeClr val="lt1"/>
+          </a:fontRef>
+        </p:style>
+        <p:txBody>
+          <a:bodyPr rtlCol="0" anchor="ctr"/>
+          <a:lstStyle/>
+          <a:p>
+            <a:pPr algn="ctr"/>
+            <a:endParaRPr lang="ko-KR" altLang="en-US">
+              <a:latin typeface="한컴 말랑말랑 Regular" panose="020F0303000000000000" pitchFamily="34" charset="-127"/>
+              <a:ea typeface="한컴 말랑말랑 Regular" panose="020F0303000000000000" pitchFamily="34" charset="-127"/>
+            </a:endParaRPr>
+          </a:p>
+        </p:txBody>
+      </p:sp>
+      <p:sp>
+        <p:nvSpPr>
+          <p:cNvPr id="2" name="직사각형 1">
+            <a:extLst>
+              <a:ext uri="{FF2B5EF4-FFF2-40B4-BE49-F238E27FC236}">
+                <a16:creationId xmlns:a16="http://schemas.microsoft.com/office/drawing/2014/main" id="{894DC2B0-21D9-4CDE-B170-991074FF6C05}"/>
+              </a:ext>
+            </a:extLst>
+          </p:cNvPr>
+          <p:cNvSpPr/>
+          <p:nvPr/>
+        </p:nvSpPr>
+        <p:spPr>
+          <a:xfrm>
+            <a:off x="2649133" y="1570732"/>
+            <a:ext cx="2160000" cy="3600000"/>
+          </a:xfrm>
+          <a:prstGeom prst="rect">
+            <a:avLst/>
+          </a:prstGeom>
+          <a:solidFill>
+            <a:schemeClr val="bg1"/>
+          </a:solidFill>
+          <a:ln>
+            <a:solidFill>
+              <a:srgbClr val="00A6B6"/>
+            </a:solidFill>
+          </a:ln>
+        </p:spPr>
+        <p:style>
+          <a:lnRef idx="2">
+            <a:schemeClr val="accent1">
+              <a:shade val="50000"/>
+            </a:schemeClr>
+          </a:lnRef>
+          <a:fillRef idx="1">
+            <a:schemeClr val="accent1"/>
+          </a:fillRef>
+          <a:effectRef idx="0">
+            <a:schemeClr val="accent1"/>
+          </a:effectRef>
+          <a:fontRef idx="minor">
+            <a:schemeClr val="lt1"/>
+          </a:fontRef>
+        </p:style>
+        <p:txBody>
+          <a:bodyPr lIns="36000" tIns="36000" rIns="36000" bIns="36000" rtlCol="0" anchor="ctr"/>
+          <a:lstStyle/>
+          <a:p>
+            <a:pPr algn="ctr"/>
+            <a:endParaRPr lang="ko-KR" altLang="en-US">
+              <a:latin typeface="한컴 말랑말랑 Regular" panose="020F0303000000000000" pitchFamily="34" charset="-127"/>
+              <a:ea typeface="한컴 말랑말랑 Regular" panose="020F0303000000000000" pitchFamily="34" charset="-127"/>
+            </a:endParaRPr>
+          </a:p>
+        </p:txBody>
+      </p:sp>
+      <p:sp>
+        <p:nvSpPr>
+          <p:cNvPr id="4" name="직사각형 3">
+            <a:extLst>
+              <a:ext uri="{FF2B5EF4-FFF2-40B4-BE49-F238E27FC236}">
+                <a16:creationId xmlns:a16="http://schemas.microsoft.com/office/drawing/2014/main" id="{A83FE560-8BDB-4390-B383-4CE21973363D}"/>
+              </a:ext>
+            </a:extLst>
+          </p:cNvPr>
+          <p:cNvSpPr/>
+          <p:nvPr/>
+        </p:nvSpPr>
+        <p:spPr>
+          <a:xfrm>
+            <a:off x="2865133" y="1360361"/>
+            <a:ext cx="1728000" cy="432000"/>
+          </a:xfrm>
+          <a:prstGeom prst="rect">
+            <a:avLst/>
+          </a:prstGeom>
+          <a:solidFill>
+            <a:srgbClr val="00A6B6"/>
+          </a:solidFill>
+          <a:ln>
+            <a:solidFill>
+              <a:schemeClr val="tx1"/>
+            </a:solidFill>
+          </a:ln>
+        </p:spPr>
+        <p:style>
+          <a:lnRef idx="2">
+            <a:schemeClr val="accent1">
+              <a:shade val="50000"/>
+            </a:schemeClr>
+          </a:lnRef>
+          <a:fillRef idx="1">
+            <a:schemeClr val="accent1"/>
+          </a:fillRef>
+          <a:effectRef idx="0">
+            <a:schemeClr val="accent1"/>
+          </a:effectRef>
+          <a:fontRef idx="minor">
+            <a:schemeClr val="lt1"/>
+          </a:fontRef>
+        </p:style>
+        <p:txBody>
+          <a:bodyPr lIns="36000" tIns="36000" rIns="36000" bIns="36000" rtlCol="0" anchor="ctr"/>
+          <a:lstStyle/>
+          <a:p>
+            <a:pPr algn="ctr"/>
+            <a:r>
+              <a:rPr lang="ko-KR" altLang="en-US" dirty="0">
+                <a:latin typeface="한컴 말랑말랑 Regular" panose="020F0303000000000000" pitchFamily="34" charset="-127"/>
+                <a:ea typeface="한컴 말랑말랑 Regular" panose="020F0303000000000000" pitchFamily="34" charset="-127"/>
+              </a:rPr>
+              <a:t>키워드 리스트</a:t>
+            </a:r>
+          </a:p>
+        </p:txBody>
+      </p:sp>
+      <p:sp>
+        <p:nvSpPr>
+          <p:cNvPr id="5" name="사각형: 둥근 모서리 4">
+            <a:extLst>
+              <a:ext uri="{FF2B5EF4-FFF2-40B4-BE49-F238E27FC236}">
+                <a16:creationId xmlns:a16="http://schemas.microsoft.com/office/drawing/2014/main" id="{288057F0-6B3E-47C0-9634-FEA02BA7B9BE}"/>
+              </a:ext>
+            </a:extLst>
+          </p:cNvPr>
+          <p:cNvSpPr/>
+          <p:nvPr/>
+        </p:nvSpPr>
+        <p:spPr>
+          <a:xfrm>
+            <a:off x="3009133" y="1900732"/>
+            <a:ext cx="1440000" cy="540000"/>
+          </a:xfrm>
+          <a:prstGeom prst="roundRect">
+            <a:avLst>
+              <a:gd name="adj" fmla="val 33914"/>
+            </a:avLst>
+          </a:prstGeom>
+          <a:solidFill>
+            <a:schemeClr val="bg1"/>
+          </a:solidFill>
+          <a:ln>
+            <a:solidFill>
+              <a:srgbClr val="00A6B6"/>
+            </a:solidFill>
+          </a:ln>
+        </p:spPr>
+        <p:style>
+          <a:lnRef idx="2">
+            <a:schemeClr val="accent1">
+              <a:shade val="50000"/>
+            </a:schemeClr>
+          </a:lnRef>
+          <a:fillRef idx="1">
+            <a:schemeClr val="accent1"/>
+          </a:fillRef>
+          <a:effectRef idx="0">
+            <a:schemeClr val="accent1"/>
+          </a:effectRef>
+          <a:fontRef idx="minor">
+            <a:schemeClr val="lt1"/>
+          </a:fontRef>
+        </p:style>
+        <p:txBody>
+          <a:bodyPr lIns="36000" tIns="36000" rIns="36000" bIns="36000" rtlCol="0" anchor="ctr"/>
+          <a:lstStyle/>
+          <a:p>
+            <a:pPr algn="ctr"/>
+            <a:r>
+              <a:rPr lang="ko-KR" altLang="en-US" dirty="0">
+                <a:solidFill>
+                  <a:srgbClr val="00A6B6"/>
+                </a:solidFill>
+                <a:latin typeface="한컴 말랑말랑 Regular" panose="020F0303000000000000" pitchFamily="34" charset="-127"/>
+                <a:ea typeface="한컴 말랑말랑 Regular" panose="020F0303000000000000" pitchFamily="34" charset="-127"/>
+              </a:rPr>
+              <a:t>성격 키워드</a:t>
+            </a:r>
+          </a:p>
+        </p:txBody>
+      </p:sp>
+      <p:sp>
+        <p:nvSpPr>
+          <p:cNvPr id="6" name="사각형: 둥근 모서리 5">
+            <a:extLst>
+              <a:ext uri="{FF2B5EF4-FFF2-40B4-BE49-F238E27FC236}">
+                <a16:creationId xmlns:a16="http://schemas.microsoft.com/office/drawing/2014/main" id="{48821A9A-B232-4473-891C-8516197259FF}"/>
+              </a:ext>
+            </a:extLst>
+          </p:cNvPr>
+          <p:cNvSpPr/>
+          <p:nvPr/>
+        </p:nvSpPr>
+        <p:spPr>
+          <a:xfrm>
+            <a:off x="3009133" y="2500732"/>
+            <a:ext cx="1440000" cy="540000"/>
+          </a:xfrm>
+          <a:prstGeom prst="roundRect">
+            <a:avLst>
+              <a:gd name="adj" fmla="val 33914"/>
+            </a:avLst>
+          </a:prstGeom>
+          <a:solidFill>
+            <a:schemeClr val="bg1"/>
+          </a:solidFill>
+          <a:ln>
+            <a:solidFill>
+              <a:srgbClr val="00A6B6"/>
+            </a:solidFill>
+          </a:ln>
+        </p:spPr>
+        <p:style>
+          <a:lnRef idx="2">
+            <a:schemeClr val="accent1">
+              <a:shade val="50000"/>
+            </a:schemeClr>
+          </a:lnRef>
+          <a:fillRef idx="1">
+            <a:schemeClr val="accent1"/>
+          </a:fillRef>
+          <a:effectRef idx="0">
+            <a:schemeClr val="accent1"/>
+          </a:effectRef>
+          <a:fontRef idx="minor">
+            <a:schemeClr val="lt1"/>
+          </a:fontRef>
+        </p:style>
+        <p:txBody>
+          <a:bodyPr lIns="36000" tIns="36000" rIns="36000" bIns="36000" rtlCol="0" anchor="ctr"/>
+          <a:lstStyle/>
+          <a:p>
+            <a:pPr algn="ctr"/>
+            <a:r>
+              <a:rPr lang="ko-KR" altLang="en-US" dirty="0">
+                <a:solidFill>
+                  <a:srgbClr val="00A6B6"/>
+                </a:solidFill>
+                <a:latin typeface="한컴 말랑말랑 Regular" panose="020F0303000000000000" pitchFamily="34" charset="-127"/>
+                <a:ea typeface="한컴 말랑말랑 Regular" panose="020F0303000000000000" pitchFamily="34" charset="-127"/>
+              </a:rPr>
+              <a:t>성격 키워드</a:t>
+            </a:r>
+          </a:p>
+        </p:txBody>
+      </p:sp>
+      <p:sp>
+        <p:nvSpPr>
+          <p:cNvPr id="7" name="사각형: 둥근 모서리 6">
+            <a:extLst>
+              <a:ext uri="{FF2B5EF4-FFF2-40B4-BE49-F238E27FC236}">
+                <a16:creationId xmlns:a16="http://schemas.microsoft.com/office/drawing/2014/main" id="{BA12329B-571B-46F0-A297-2144E8FE5176}"/>
+              </a:ext>
+            </a:extLst>
+          </p:cNvPr>
+          <p:cNvSpPr/>
+          <p:nvPr/>
+        </p:nvSpPr>
+        <p:spPr>
+          <a:xfrm>
+            <a:off x="3009133" y="3100732"/>
+            <a:ext cx="1440000" cy="540000"/>
+          </a:xfrm>
+          <a:prstGeom prst="roundRect">
+            <a:avLst>
+              <a:gd name="adj" fmla="val 33914"/>
+            </a:avLst>
+          </a:prstGeom>
+          <a:solidFill>
+            <a:schemeClr val="bg1"/>
+          </a:solidFill>
+          <a:ln>
+            <a:solidFill>
+              <a:srgbClr val="00A6B6"/>
+            </a:solidFill>
+          </a:ln>
+        </p:spPr>
+        <p:style>
+          <a:lnRef idx="2">
+            <a:schemeClr val="accent1">
+              <a:shade val="50000"/>
+            </a:schemeClr>
+          </a:lnRef>
+          <a:fillRef idx="1">
+            <a:schemeClr val="accent1"/>
+          </a:fillRef>
+          <a:effectRef idx="0">
+            <a:schemeClr val="accent1"/>
+          </a:effectRef>
+          <a:fontRef idx="minor">
+            <a:schemeClr val="lt1"/>
+          </a:fontRef>
+        </p:style>
+        <p:txBody>
+          <a:bodyPr lIns="36000" tIns="36000" rIns="36000" bIns="36000" rtlCol="0" anchor="ctr"/>
+          <a:lstStyle/>
+          <a:p>
+            <a:pPr algn="ctr"/>
+            <a:r>
+              <a:rPr lang="ko-KR" altLang="en-US" dirty="0">
+                <a:solidFill>
+                  <a:srgbClr val="00A6B6"/>
+                </a:solidFill>
+                <a:latin typeface="한컴 말랑말랑 Regular" panose="020F0303000000000000" pitchFamily="34" charset="-127"/>
+                <a:ea typeface="한컴 말랑말랑 Regular" panose="020F0303000000000000" pitchFamily="34" charset="-127"/>
+              </a:rPr>
+              <a:t>성격 키워드</a:t>
+            </a:r>
+          </a:p>
+        </p:txBody>
+      </p:sp>
+      <p:sp>
+        <p:nvSpPr>
+          <p:cNvPr id="8" name="사각형: 둥근 모서리 7">
+            <a:extLst>
+              <a:ext uri="{FF2B5EF4-FFF2-40B4-BE49-F238E27FC236}">
+                <a16:creationId xmlns:a16="http://schemas.microsoft.com/office/drawing/2014/main" id="{BE4FB73F-D0D6-4FC4-A163-40916D78F3AF}"/>
+              </a:ext>
+            </a:extLst>
+          </p:cNvPr>
+          <p:cNvSpPr/>
+          <p:nvPr/>
+        </p:nvSpPr>
+        <p:spPr>
+          <a:xfrm>
+            <a:off x="3009133" y="3700732"/>
+            <a:ext cx="1440000" cy="540000"/>
+          </a:xfrm>
+          <a:prstGeom prst="roundRect">
+            <a:avLst>
+              <a:gd name="adj" fmla="val 33914"/>
+            </a:avLst>
+          </a:prstGeom>
+          <a:solidFill>
+            <a:schemeClr val="bg1"/>
+          </a:solidFill>
+          <a:ln>
+            <a:solidFill>
+              <a:srgbClr val="00A6B6"/>
+            </a:solidFill>
+          </a:ln>
+        </p:spPr>
+        <p:style>
+          <a:lnRef idx="2">
+            <a:schemeClr val="accent1">
+              <a:shade val="50000"/>
+            </a:schemeClr>
+          </a:lnRef>
+          <a:fillRef idx="1">
+            <a:schemeClr val="accent1"/>
+          </a:fillRef>
+          <a:effectRef idx="0">
+            <a:schemeClr val="accent1"/>
+          </a:effectRef>
+          <a:fontRef idx="minor">
+            <a:schemeClr val="lt1"/>
+          </a:fontRef>
+        </p:style>
+        <p:txBody>
+          <a:bodyPr lIns="36000" tIns="36000" rIns="36000" bIns="36000" rtlCol="0" anchor="ctr"/>
+          <a:lstStyle/>
+          <a:p>
+            <a:pPr algn="ctr"/>
+            <a:r>
+              <a:rPr lang="ko-KR" altLang="en-US" dirty="0">
+                <a:solidFill>
+                  <a:srgbClr val="00A6B6"/>
+                </a:solidFill>
+                <a:latin typeface="한컴 말랑말랑 Regular" panose="020F0303000000000000" pitchFamily="34" charset="-127"/>
+                <a:ea typeface="한컴 말랑말랑 Regular" panose="020F0303000000000000" pitchFamily="34" charset="-127"/>
+              </a:rPr>
+              <a:t>성격 키워드</a:t>
+            </a:r>
+          </a:p>
+        </p:txBody>
+      </p:sp>
+      <p:sp>
+        <p:nvSpPr>
+          <p:cNvPr id="9" name="사각형: 둥근 모서리 8">
+            <a:extLst>
+              <a:ext uri="{FF2B5EF4-FFF2-40B4-BE49-F238E27FC236}">
+                <a16:creationId xmlns:a16="http://schemas.microsoft.com/office/drawing/2014/main" id="{61DBF92A-1BDC-4ED3-A7FC-E2626F242394}"/>
+              </a:ext>
+            </a:extLst>
+          </p:cNvPr>
+          <p:cNvSpPr/>
+          <p:nvPr/>
+        </p:nvSpPr>
+        <p:spPr>
+          <a:xfrm>
+            <a:off x="3009133" y="4300732"/>
+            <a:ext cx="1440000" cy="540000"/>
+          </a:xfrm>
+          <a:prstGeom prst="roundRect">
+            <a:avLst>
+              <a:gd name="adj" fmla="val 33914"/>
+            </a:avLst>
+          </a:prstGeom>
+          <a:solidFill>
+            <a:schemeClr val="bg1"/>
+          </a:solidFill>
+          <a:ln>
+            <a:solidFill>
+              <a:srgbClr val="00A6B6"/>
+            </a:solidFill>
+          </a:ln>
+        </p:spPr>
+        <p:style>
+          <a:lnRef idx="2">
+            <a:schemeClr val="accent1">
+              <a:shade val="50000"/>
+            </a:schemeClr>
+          </a:lnRef>
+          <a:fillRef idx="1">
+            <a:schemeClr val="accent1"/>
+          </a:fillRef>
+          <a:effectRef idx="0">
+            <a:schemeClr val="accent1"/>
+          </a:effectRef>
+          <a:fontRef idx="minor">
+            <a:schemeClr val="lt1"/>
+          </a:fontRef>
+        </p:style>
+        <p:txBody>
+          <a:bodyPr lIns="36000" tIns="36000" rIns="36000" bIns="36000" rtlCol="0" anchor="ctr"/>
+          <a:lstStyle/>
+          <a:p>
+            <a:pPr algn="ctr"/>
+            <a:r>
+              <a:rPr lang="ko-KR" altLang="en-US" dirty="0">
+                <a:solidFill>
+                  <a:srgbClr val="00A6B6"/>
+                </a:solidFill>
+                <a:latin typeface="한컴 말랑말랑 Regular" panose="020F0303000000000000" pitchFamily="34" charset="-127"/>
+                <a:ea typeface="한컴 말랑말랑 Regular" panose="020F0303000000000000" pitchFamily="34" charset="-127"/>
+              </a:rPr>
+              <a:t>성격 키워드</a:t>
+            </a:r>
+          </a:p>
+        </p:txBody>
+      </p:sp>
+      <p:pic>
+        <p:nvPicPr>
+          <p:cNvPr id="11" name="그래픽 10" descr="폴로 셔츠를 입은 남자">
+            <a:extLst>
+              <a:ext uri="{FF2B5EF4-FFF2-40B4-BE49-F238E27FC236}">
+                <a16:creationId xmlns:a16="http://schemas.microsoft.com/office/drawing/2014/main" id="{821D3284-1D21-44FC-9122-19B0017774C9}"/>
+              </a:ext>
+            </a:extLst>
+          </p:cNvPr>
+          <p:cNvPicPr>
+            <a:picLocks noChangeAspect="1"/>
+          </p:cNvPicPr>
+          <p:nvPr/>
+        </p:nvPicPr>
+        <p:blipFill>
+          <a:blip r:embed="rId2">
+            <a:extLst>
+              <a:ext uri="{28A0092B-C50C-407E-A947-70E740481C1C}">
+                <a14:useLocalDpi xmlns:a14="http://schemas.microsoft.com/office/drawing/2010/main" val="0"/>
+              </a:ext>
+              <a:ext uri="{96DAC541-7B7A-43D3-8B79-37D633B846F1}">
+                <asvg:svgBlip xmlns:asvg="http://schemas.microsoft.com/office/drawing/2016/SVG/main" r:embed="rId3"/>
+              </a:ext>
+            </a:extLst>
+          </a:blip>
+          <a:stretch>
+            <a:fillRect/>
+          </a:stretch>
+        </p:blipFill>
+        <p:spPr>
+          <a:xfrm>
+            <a:off x="6201304" y="1676249"/>
+            <a:ext cx="1080000" cy="3388966"/>
+          </a:xfrm>
+          <a:prstGeom prst="rect">
+            <a:avLst/>
+          </a:prstGeom>
+        </p:spPr>
+      </p:pic>
+      <p:sp>
+        <p:nvSpPr>
+          <p:cNvPr id="12" name="화살표: 오른쪽 11">
+            <a:extLst>
+              <a:ext uri="{FF2B5EF4-FFF2-40B4-BE49-F238E27FC236}">
+                <a16:creationId xmlns:a16="http://schemas.microsoft.com/office/drawing/2014/main" id="{6C1B0731-4797-4B51-90EF-D6F8D4F7EF1B}"/>
+              </a:ext>
+            </a:extLst>
+          </p:cNvPr>
+          <p:cNvSpPr/>
+          <p:nvPr/>
+        </p:nvSpPr>
+        <p:spPr>
+          <a:xfrm>
+            <a:off x="5055218" y="3100732"/>
+            <a:ext cx="900000" cy="540000"/>
+          </a:xfrm>
+          <a:prstGeom prst="rightArrow">
+            <a:avLst/>
+          </a:prstGeom>
+          <a:solidFill>
+            <a:srgbClr val="00A6B6"/>
+          </a:solidFill>
+          <a:ln>
+            <a:solidFill>
+              <a:schemeClr val="tx1"/>
+            </a:solidFill>
+          </a:ln>
+        </p:spPr>
+        <p:style>
+          <a:lnRef idx="2">
+            <a:schemeClr val="accent1">
+              <a:shade val="50000"/>
+            </a:schemeClr>
+          </a:lnRef>
+          <a:fillRef idx="1">
+            <a:schemeClr val="accent1"/>
+          </a:fillRef>
+          <a:effectRef idx="0">
+            <a:schemeClr val="accent1"/>
+          </a:effectRef>
+          <a:fontRef idx="minor">
+            <a:schemeClr val="lt1"/>
+          </a:fontRef>
+        </p:style>
+        <p:txBody>
+          <a:bodyPr lIns="36000" tIns="36000" rIns="36000" bIns="36000" rtlCol="0" anchor="ctr"/>
+          <a:lstStyle/>
+          <a:p>
+            <a:pPr algn="ctr"/>
+            <a:endParaRPr lang="ko-KR" altLang="en-US">
+              <a:latin typeface="한컴 말랑말랑 Regular" panose="020F0303000000000000" pitchFamily="34" charset="-127"/>
+              <a:ea typeface="한컴 말랑말랑 Regular" panose="020F0303000000000000" pitchFamily="34" charset="-127"/>
+            </a:endParaRPr>
+          </a:p>
+        </p:txBody>
+      </p:sp>
+      <p:sp>
+        <p:nvSpPr>
+          <p:cNvPr id="13" name="TextBox 12">
+            <a:extLst>
+              <a:ext uri="{FF2B5EF4-FFF2-40B4-BE49-F238E27FC236}">
+                <a16:creationId xmlns:a16="http://schemas.microsoft.com/office/drawing/2014/main" id="{4CA26C1D-380B-4FEE-8302-17F2E6209F14}"/>
+              </a:ext>
+            </a:extLst>
+          </p:cNvPr>
+          <p:cNvSpPr txBox="1"/>
+          <p:nvPr/>
+        </p:nvSpPr>
+        <p:spPr>
+          <a:xfrm>
+            <a:off x="5070804" y="3693733"/>
+            <a:ext cx="868828" cy="276999"/>
+          </a:xfrm>
+          <a:prstGeom prst="rect">
+            <a:avLst/>
+          </a:prstGeom>
+          <a:noFill/>
+        </p:spPr>
+        <p:txBody>
+          <a:bodyPr wrap="none" lIns="0" tIns="0" rIns="0" bIns="0" rtlCol="0" anchor="ctr">
+            <a:spAutoFit/>
+          </a:bodyPr>
+          <a:lstStyle/>
+          <a:p>
+            <a:pPr algn="ctr"/>
+            <a:r>
+              <a:rPr lang="ko-KR" altLang="en-US" dirty="0">
+                <a:latin typeface="한컴 말랑말랑 Regular" panose="020F0303000000000000" pitchFamily="34" charset="-127"/>
+                <a:ea typeface="한컴 말랑말랑 Regular" panose="020F0303000000000000" pitchFamily="34" charset="-127"/>
+              </a:rPr>
+              <a:t>랜덤 부여</a:t>
+            </a:r>
+          </a:p>
+        </p:txBody>
+      </p:sp>
+      <p:sp>
+        <p:nvSpPr>
+          <p:cNvPr id="15" name="사각형: 둥근 모서리 14">
+            <a:extLst>
+              <a:ext uri="{FF2B5EF4-FFF2-40B4-BE49-F238E27FC236}">
+                <a16:creationId xmlns:a16="http://schemas.microsoft.com/office/drawing/2014/main" id="{C39141EB-F6D2-4A9E-957C-DE93AB7D0623}"/>
+              </a:ext>
+            </a:extLst>
+          </p:cNvPr>
+          <p:cNvSpPr/>
+          <p:nvPr/>
+        </p:nvSpPr>
+        <p:spPr>
+          <a:xfrm>
+            <a:off x="4318866" y="787419"/>
+            <a:ext cx="1440000" cy="360000"/>
+          </a:xfrm>
+          <a:prstGeom prst="roundRect">
+            <a:avLst/>
+          </a:prstGeom>
+          <a:solidFill>
+            <a:srgbClr val="00B0F0"/>
+          </a:solidFill>
+          <a:ln>
+            <a:solidFill>
+              <a:schemeClr val="tx1"/>
+            </a:solidFill>
+          </a:ln>
+        </p:spPr>
+        <p:style>
+          <a:lnRef idx="2">
+            <a:schemeClr val="accent1">
+              <a:shade val="50000"/>
+            </a:schemeClr>
+          </a:lnRef>
+          <a:fillRef idx="1">
+            <a:schemeClr val="accent1"/>
+          </a:fillRef>
+          <a:effectRef idx="0">
+            <a:schemeClr val="accent1"/>
+          </a:effectRef>
+          <a:fontRef idx="minor">
+            <a:schemeClr val="lt1"/>
+          </a:fontRef>
+        </p:style>
+        <p:txBody>
+          <a:bodyPr lIns="36000" tIns="36000" rIns="36000" bIns="36000" rtlCol="0" anchor="ctr"/>
+          <a:lstStyle/>
+          <a:p>
+            <a:pPr algn="ctr"/>
+            <a:r>
+              <a:rPr lang="ko-KR" altLang="en-US" dirty="0">
+                <a:latin typeface="한컴 말랑말랑 Regular" panose="020F0303000000000000" pitchFamily="34" charset="-127"/>
+                <a:ea typeface="한컴 말랑말랑 Regular" panose="020F0303000000000000" pitchFamily="34" charset="-127"/>
+              </a:rPr>
+              <a:t>스테이지 진입</a:t>
+            </a:r>
+          </a:p>
+        </p:txBody>
+      </p:sp>
+      <p:sp>
+        <p:nvSpPr>
+          <p:cNvPr id="16" name="TextBox 15">
+            <a:extLst>
+              <a:ext uri="{FF2B5EF4-FFF2-40B4-BE49-F238E27FC236}">
+                <a16:creationId xmlns:a16="http://schemas.microsoft.com/office/drawing/2014/main" id="{800541AD-11F8-4D99-AA51-32C8C5086E1E}"/>
+              </a:ext>
+            </a:extLst>
+          </p:cNvPr>
+          <p:cNvSpPr txBox="1"/>
+          <p:nvPr/>
+        </p:nvSpPr>
+        <p:spPr>
+          <a:xfrm>
+            <a:off x="6361650" y="1399250"/>
+            <a:ext cx="759311" cy="276999"/>
+          </a:xfrm>
+          <a:prstGeom prst="rect">
+            <a:avLst/>
+          </a:prstGeom>
+          <a:noFill/>
+        </p:spPr>
+        <p:txBody>
+          <a:bodyPr wrap="none" lIns="0" tIns="0" rIns="0" bIns="0" rtlCol="0" anchor="ctr">
+            <a:spAutoFit/>
+          </a:bodyPr>
+          <a:lstStyle/>
+          <a:p>
+            <a:pPr algn="ctr"/>
+            <a:r>
+              <a:rPr lang="en-US" altLang="ko-KR" dirty="0">
+                <a:latin typeface="한컴 말랑말랑 Regular" panose="020F0303000000000000" pitchFamily="34" charset="-127"/>
+                <a:ea typeface="한컴 말랑말랑 Regular" panose="020F0303000000000000" pitchFamily="34" charset="-127"/>
+              </a:rPr>
+              <a:t>AI NPC</a:t>
+            </a:r>
+            <a:endParaRPr lang="ko-KR" altLang="en-US" dirty="0">
+              <a:latin typeface="한컴 말랑말랑 Regular" panose="020F0303000000000000" pitchFamily="34" charset="-127"/>
+              <a:ea typeface="한컴 말랑말랑 Regular" panose="020F0303000000000000" pitchFamily="34" charset="-127"/>
+            </a:endParaRPr>
+          </a:p>
+        </p:txBody>
+      </p:sp>
+    </p:spTree>
+    <p:extLst>
+      <p:ext uri="{BB962C8B-B14F-4D97-AF65-F5344CB8AC3E}">
+        <p14:creationId xmlns:p14="http://schemas.microsoft.com/office/powerpoint/2010/main" val="2833916883"/>
+      </p:ext>
+    </p:extLst>
+  </p:cSld>
+  <p:clrMapOvr>
+    <a:masterClrMapping/>
+  </p:clrMapOvr>
+</p:sld>
+</file>
+
+<file path=ppt/slides/slide2.xml><?xml version="1.0" encoding="utf-8"?>
+<p:sld xmlns:a="http://schemas.openxmlformats.org/drawingml/2006/main" xmlns:r="http://schemas.openxmlformats.org/officeDocument/2006/relationships" xmlns:p="http://schemas.openxmlformats.org/presentationml/2006/main">
+  <p:cSld>
+    <p:spTree>
+      <p:nvGrpSpPr>
+        <p:cNvPr id="1" name=""/>
+        <p:cNvGrpSpPr/>
+        <p:nvPr/>
+      </p:nvGrpSpPr>
+      <p:grpSpPr>
+        <a:xfrm>
+          <a:off x="0" y="0"/>
+          <a:ext cx="0" cy="0"/>
+          <a:chOff x="0" y="0"/>
+          <a:chExt cx="0" cy="0"/>
+        </a:xfrm>
+      </p:grpSpPr>
       <p:pic>
         <p:nvPicPr>
           <p:cNvPr id="3" name="그림 2">
@@ -5399,7 +6170,7 @@
 </p:sld>
 </file>
 
-<file path=ppt/slides/slide2.xml><?xml version="1.0" encoding="utf-8"?>
+<file path=ppt/slides/slide3.xml><?xml version="1.0" encoding="utf-8"?>
 <p:sld xmlns:a="http://schemas.openxmlformats.org/drawingml/2006/main" xmlns:r="http://schemas.openxmlformats.org/officeDocument/2006/relationships" xmlns:p="http://schemas.openxmlformats.org/presentationml/2006/main">
   <p:cSld>
     <p:spTree>
@@ -5516,7 +6287,7 @@
 </p:sld>
 </file>
 
-<file path=ppt/slides/slide3.xml><?xml version="1.0" encoding="utf-8"?>
+<file path=ppt/slides/slide4.xml><?xml version="1.0" encoding="utf-8"?>
 <p:sld xmlns:a="http://schemas.openxmlformats.org/drawingml/2006/main" xmlns:r="http://schemas.openxmlformats.org/officeDocument/2006/relationships" xmlns:p="http://schemas.openxmlformats.org/presentationml/2006/main">
   <p:cSld>
     <p:spTree>
@@ -5839,6 +6610,1108 @@
     <p:extLst>
       <p:ext uri="{BB962C8B-B14F-4D97-AF65-F5344CB8AC3E}">
         <p14:creationId xmlns:p14="http://schemas.microsoft.com/office/powerpoint/2010/main" val="2550628254"/>
+      </p:ext>
+    </p:extLst>
+  </p:cSld>
+  <p:clrMapOvr>
+    <a:masterClrMapping/>
+  </p:clrMapOvr>
+</p:sld>
+</file>
+
+<file path=ppt/slides/slide5.xml><?xml version="1.0" encoding="utf-8"?>
+<p:sld xmlns:a="http://schemas.openxmlformats.org/drawingml/2006/main" xmlns:r="http://schemas.openxmlformats.org/officeDocument/2006/relationships" xmlns:p="http://schemas.openxmlformats.org/presentationml/2006/main">
+  <p:cSld>
+    <p:spTree>
+      <p:nvGrpSpPr>
+        <p:cNvPr id="1" name=""/>
+        <p:cNvGrpSpPr/>
+        <p:nvPr/>
+      </p:nvGrpSpPr>
+      <p:grpSpPr>
+        <a:xfrm>
+          <a:off x="0" y="0"/>
+          <a:ext cx="0" cy="0"/>
+          <a:chOff x="0" y="0"/>
+          <a:chExt cx="0" cy="0"/>
+        </a:xfrm>
+      </p:grpSpPr>
+      <p:pic>
+        <p:nvPicPr>
+          <p:cNvPr id="3" name="그림 2">
+            <a:extLst>
+              <a:ext uri="{FF2B5EF4-FFF2-40B4-BE49-F238E27FC236}">
+                <a16:creationId xmlns:a16="http://schemas.microsoft.com/office/drawing/2014/main" id="{8E0061A6-BE3E-4816-8239-EC53518681BD}"/>
+              </a:ext>
+            </a:extLst>
+          </p:cNvPr>
+          <p:cNvPicPr>
+            <a:picLocks noChangeAspect="1"/>
+          </p:cNvPicPr>
+          <p:nvPr/>
+        </p:nvPicPr>
+        <p:blipFill rotWithShape="1">
+          <a:blip r:embed="rId2"/>
+          <a:srcRect l="902" t="841" r="1805" b="1587"/>
+          <a:stretch/>
+        </p:blipFill>
+        <p:spPr>
+          <a:xfrm>
+            <a:off x="1283404" y="729000"/>
+            <a:ext cx="9625192" cy="5400000"/>
+          </a:xfrm>
+          <a:prstGeom prst="rect">
+            <a:avLst/>
+          </a:prstGeom>
+        </p:spPr>
+      </p:pic>
+      <p:pic>
+        <p:nvPicPr>
+          <p:cNvPr id="5" name="그래픽 4" descr="오른쪽을 가리키는 검지  단색으로 채워진">
+            <a:extLst>
+              <a:ext uri="{FF2B5EF4-FFF2-40B4-BE49-F238E27FC236}">
+                <a16:creationId xmlns:a16="http://schemas.microsoft.com/office/drawing/2014/main" id="{94802212-77F6-49A7-87FD-DB7F6BA64022}"/>
+              </a:ext>
+            </a:extLst>
+          </p:cNvPr>
+          <p:cNvPicPr>
+            <a:picLocks noChangeAspect="1"/>
+          </p:cNvPicPr>
+          <p:nvPr/>
+        </p:nvPicPr>
+        <p:blipFill>
+          <a:blip r:embed="rId3">
+            <a:extLst>
+              <a:ext uri="{28A0092B-C50C-407E-A947-70E740481C1C}">
+                <a14:useLocalDpi xmlns:a14="http://schemas.microsoft.com/office/drawing/2010/main" val="0"/>
+              </a:ext>
+              <a:ext uri="{96DAC541-7B7A-43D3-8B79-37D633B846F1}">
+                <asvg:svgBlip xmlns:asvg="http://schemas.microsoft.com/office/drawing/2016/SVG/main" r:embed="rId4"/>
+              </a:ext>
+            </a:extLst>
+          </a:blip>
+          <a:stretch>
+            <a:fillRect/>
+          </a:stretch>
+        </p:blipFill>
+        <p:spPr>
+          <a:xfrm rot="16200000">
+            <a:off x="10126133" y="5501133"/>
+            <a:ext cx="540000" cy="540000"/>
+          </a:xfrm>
+          <a:prstGeom prst="rect">
+            <a:avLst/>
+          </a:prstGeom>
+        </p:spPr>
+      </p:pic>
+    </p:spTree>
+    <p:extLst>
+      <p:ext uri="{BB962C8B-B14F-4D97-AF65-F5344CB8AC3E}">
+        <p14:creationId xmlns:p14="http://schemas.microsoft.com/office/powerpoint/2010/main" val="2601324192"/>
+      </p:ext>
+    </p:extLst>
+  </p:cSld>
+  <p:clrMapOvr>
+    <a:masterClrMapping/>
+  </p:clrMapOvr>
+</p:sld>
+</file>
+
+<file path=ppt/slides/slide6.xml><?xml version="1.0" encoding="utf-8"?>
+<p:sld xmlns:a="http://schemas.openxmlformats.org/drawingml/2006/main" xmlns:r="http://schemas.openxmlformats.org/officeDocument/2006/relationships" xmlns:p="http://schemas.openxmlformats.org/presentationml/2006/main">
+  <p:cSld>
+    <p:spTree>
+      <p:nvGrpSpPr>
+        <p:cNvPr id="1" name=""/>
+        <p:cNvGrpSpPr/>
+        <p:nvPr/>
+      </p:nvGrpSpPr>
+      <p:grpSpPr>
+        <a:xfrm>
+          <a:off x="0" y="0"/>
+          <a:ext cx="0" cy="0"/>
+          <a:chOff x="0" y="0"/>
+          <a:chExt cx="0" cy="0"/>
+        </a:xfrm>
+      </p:grpSpPr>
+      <p:pic>
+        <p:nvPicPr>
+          <p:cNvPr id="10" name="그림 9">
+            <a:extLst>
+              <a:ext uri="{FF2B5EF4-FFF2-40B4-BE49-F238E27FC236}">
+                <a16:creationId xmlns:a16="http://schemas.microsoft.com/office/drawing/2014/main" id="{D4F3AE76-9788-4545-ADA2-B5BC8EB8FB25}"/>
+              </a:ext>
+            </a:extLst>
+          </p:cNvPr>
+          <p:cNvPicPr>
+            <a:picLocks noChangeAspect="1"/>
+          </p:cNvPicPr>
+          <p:nvPr/>
+        </p:nvPicPr>
+        <p:blipFill>
+          <a:blip r:embed="rId2"/>
+          <a:stretch>
+            <a:fillRect/>
+          </a:stretch>
+        </p:blipFill>
+        <p:spPr>
+          <a:xfrm>
+            <a:off x="2180678" y="1609471"/>
+            <a:ext cx="7830643" cy="3639058"/>
+          </a:xfrm>
+          <a:prstGeom prst="rect">
+            <a:avLst/>
+          </a:prstGeom>
+        </p:spPr>
+      </p:pic>
+      <p:sp>
+        <p:nvSpPr>
+          <p:cNvPr id="4" name="타원 3">
+            <a:extLst>
+              <a:ext uri="{FF2B5EF4-FFF2-40B4-BE49-F238E27FC236}">
+                <a16:creationId xmlns:a16="http://schemas.microsoft.com/office/drawing/2014/main" id="{A1BA4B04-249F-4AE3-83ED-5F2C73B5920C}"/>
+              </a:ext>
+            </a:extLst>
+          </p:cNvPr>
+          <p:cNvSpPr/>
+          <p:nvPr/>
+        </p:nvSpPr>
+        <p:spPr>
+          <a:xfrm>
+            <a:off x="2454202" y="1924735"/>
+            <a:ext cx="288000" cy="288000"/>
+          </a:xfrm>
+          <a:prstGeom prst="ellipse">
+            <a:avLst/>
+          </a:prstGeom>
+          <a:solidFill>
+            <a:srgbClr val="FAFAFA">
+              <a:alpha val="50196"/>
+            </a:srgbClr>
+          </a:solidFill>
+          <a:ln>
+            <a:solidFill>
+              <a:srgbClr val="FF0000"/>
+            </a:solidFill>
+          </a:ln>
+        </p:spPr>
+        <p:style>
+          <a:lnRef idx="2">
+            <a:schemeClr val="accent1">
+              <a:shade val="50000"/>
+            </a:schemeClr>
+          </a:lnRef>
+          <a:fillRef idx="1">
+            <a:schemeClr val="accent1"/>
+          </a:fillRef>
+          <a:effectRef idx="0">
+            <a:schemeClr val="accent1"/>
+          </a:effectRef>
+          <a:fontRef idx="minor">
+            <a:schemeClr val="lt1"/>
+          </a:fontRef>
+        </p:style>
+        <p:txBody>
+          <a:bodyPr wrap="none" lIns="0" tIns="0" rIns="0" rtlCol="0" anchor="ctr"/>
+          <a:lstStyle/>
+          <a:p>
+            <a:pPr algn="ctr"/>
+            <a:r>
+              <a:rPr lang="en-US" altLang="ko-KR" sz="1600" b="1" dirty="0">
+                <a:solidFill>
+                  <a:srgbClr val="FF0000"/>
+                </a:solidFill>
+              </a:rPr>
+              <a:t>1</a:t>
+            </a:r>
+            <a:endParaRPr lang="ko-KR" altLang="en-US" sz="1600" b="1" dirty="0">
+              <a:solidFill>
+                <a:srgbClr val="FF0000"/>
+              </a:solidFill>
+            </a:endParaRPr>
+          </a:p>
+        </p:txBody>
+      </p:sp>
+      <p:sp>
+        <p:nvSpPr>
+          <p:cNvPr id="5" name="타원 4">
+            <a:extLst>
+              <a:ext uri="{FF2B5EF4-FFF2-40B4-BE49-F238E27FC236}">
+                <a16:creationId xmlns:a16="http://schemas.microsoft.com/office/drawing/2014/main" id="{516CF3ED-2B26-45B1-BC89-E488F132C3EB}"/>
+              </a:ext>
+            </a:extLst>
+          </p:cNvPr>
+          <p:cNvSpPr/>
+          <p:nvPr/>
+        </p:nvSpPr>
+        <p:spPr>
+          <a:xfrm>
+            <a:off x="2598202" y="2784235"/>
+            <a:ext cx="288000" cy="288000"/>
+          </a:xfrm>
+          <a:prstGeom prst="ellipse">
+            <a:avLst/>
+          </a:prstGeom>
+          <a:solidFill>
+            <a:srgbClr val="FAFAFA">
+              <a:alpha val="50196"/>
+            </a:srgbClr>
+          </a:solidFill>
+          <a:ln>
+            <a:solidFill>
+              <a:srgbClr val="FF0000"/>
+            </a:solidFill>
+          </a:ln>
+        </p:spPr>
+        <p:style>
+          <a:lnRef idx="2">
+            <a:schemeClr val="accent1">
+              <a:shade val="50000"/>
+            </a:schemeClr>
+          </a:lnRef>
+          <a:fillRef idx="1">
+            <a:schemeClr val="accent1"/>
+          </a:fillRef>
+          <a:effectRef idx="0">
+            <a:schemeClr val="accent1"/>
+          </a:effectRef>
+          <a:fontRef idx="minor">
+            <a:schemeClr val="lt1"/>
+          </a:fontRef>
+        </p:style>
+        <p:txBody>
+          <a:bodyPr wrap="none" lIns="0" tIns="0" rIns="0" rtlCol="0" anchor="ctr"/>
+          <a:lstStyle/>
+          <a:p>
+            <a:pPr algn="ctr"/>
+            <a:r>
+              <a:rPr lang="en-US" altLang="ko-KR" sz="1600" b="1" dirty="0">
+                <a:solidFill>
+                  <a:srgbClr val="FF0000"/>
+                </a:solidFill>
+              </a:rPr>
+              <a:t>2</a:t>
+            </a:r>
+            <a:endParaRPr lang="ko-KR" altLang="en-US" sz="1600" b="1" dirty="0">
+              <a:solidFill>
+                <a:srgbClr val="FF0000"/>
+              </a:solidFill>
+            </a:endParaRPr>
+          </a:p>
+        </p:txBody>
+      </p:sp>
+      <p:sp>
+        <p:nvSpPr>
+          <p:cNvPr id="6" name="타원 5">
+            <a:extLst>
+              <a:ext uri="{FF2B5EF4-FFF2-40B4-BE49-F238E27FC236}">
+                <a16:creationId xmlns:a16="http://schemas.microsoft.com/office/drawing/2014/main" id="{33D87F9B-78F3-4574-833B-40526A8488C3}"/>
+              </a:ext>
+            </a:extLst>
+          </p:cNvPr>
+          <p:cNvSpPr/>
+          <p:nvPr/>
+        </p:nvSpPr>
+        <p:spPr>
+          <a:xfrm>
+            <a:off x="2454202" y="4246999"/>
+            <a:ext cx="288000" cy="288000"/>
+          </a:xfrm>
+          <a:prstGeom prst="ellipse">
+            <a:avLst/>
+          </a:prstGeom>
+          <a:solidFill>
+            <a:srgbClr val="FAFAFA">
+              <a:alpha val="50196"/>
+            </a:srgbClr>
+          </a:solidFill>
+          <a:ln>
+            <a:solidFill>
+              <a:srgbClr val="FF0000"/>
+            </a:solidFill>
+          </a:ln>
+        </p:spPr>
+        <p:style>
+          <a:lnRef idx="2">
+            <a:schemeClr val="accent1">
+              <a:shade val="50000"/>
+            </a:schemeClr>
+          </a:lnRef>
+          <a:fillRef idx="1">
+            <a:schemeClr val="accent1"/>
+          </a:fillRef>
+          <a:effectRef idx="0">
+            <a:schemeClr val="accent1"/>
+          </a:effectRef>
+          <a:fontRef idx="minor">
+            <a:schemeClr val="lt1"/>
+          </a:fontRef>
+        </p:style>
+        <p:txBody>
+          <a:bodyPr wrap="none" lIns="0" tIns="0" rIns="0" rtlCol="0" anchor="ctr"/>
+          <a:lstStyle/>
+          <a:p>
+            <a:pPr algn="ctr"/>
+            <a:r>
+              <a:rPr lang="en-US" altLang="ko-KR" sz="1600" b="1" dirty="0">
+                <a:solidFill>
+                  <a:srgbClr val="FF0000"/>
+                </a:solidFill>
+              </a:rPr>
+              <a:t>3</a:t>
+            </a:r>
+            <a:endParaRPr lang="ko-KR" altLang="en-US" sz="1600" b="1" dirty="0">
+              <a:solidFill>
+                <a:srgbClr val="FF0000"/>
+              </a:solidFill>
+            </a:endParaRPr>
+          </a:p>
+        </p:txBody>
+      </p:sp>
+      <p:sp>
+        <p:nvSpPr>
+          <p:cNvPr id="7" name="타원 6">
+            <a:extLst>
+              <a:ext uri="{FF2B5EF4-FFF2-40B4-BE49-F238E27FC236}">
+                <a16:creationId xmlns:a16="http://schemas.microsoft.com/office/drawing/2014/main" id="{BE45FB01-8EF6-49B5-921B-ABAC0EB7B652}"/>
+              </a:ext>
+            </a:extLst>
+          </p:cNvPr>
+          <p:cNvSpPr/>
+          <p:nvPr/>
+        </p:nvSpPr>
+        <p:spPr>
+          <a:xfrm>
+            <a:off x="4242502" y="4246999"/>
+            <a:ext cx="288000" cy="288000"/>
+          </a:xfrm>
+          <a:prstGeom prst="ellipse">
+            <a:avLst/>
+          </a:prstGeom>
+          <a:solidFill>
+            <a:srgbClr val="FAFAFA">
+              <a:alpha val="50196"/>
+            </a:srgbClr>
+          </a:solidFill>
+          <a:ln>
+            <a:solidFill>
+              <a:srgbClr val="FF0000"/>
+            </a:solidFill>
+          </a:ln>
+        </p:spPr>
+        <p:style>
+          <a:lnRef idx="2">
+            <a:schemeClr val="accent1">
+              <a:shade val="50000"/>
+            </a:schemeClr>
+          </a:lnRef>
+          <a:fillRef idx="1">
+            <a:schemeClr val="accent1"/>
+          </a:fillRef>
+          <a:effectRef idx="0">
+            <a:schemeClr val="accent1"/>
+          </a:effectRef>
+          <a:fontRef idx="minor">
+            <a:schemeClr val="lt1"/>
+          </a:fontRef>
+        </p:style>
+        <p:txBody>
+          <a:bodyPr wrap="none" lIns="0" tIns="0" rIns="0" rtlCol="0" anchor="ctr"/>
+          <a:lstStyle/>
+          <a:p>
+            <a:pPr algn="ctr"/>
+            <a:r>
+              <a:rPr lang="en-US" altLang="ko-KR" sz="1600" b="1" dirty="0">
+                <a:solidFill>
+                  <a:srgbClr val="FF0000"/>
+                </a:solidFill>
+              </a:rPr>
+              <a:t>4</a:t>
+            </a:r>
+            <a:endParaRPr lang="ko-KR" altLang="en-US" sz="1600" b="1" dirty="0">
+              <a:solidFill>
+                <a:srgbClr val="FF0000"/>
+              </a:solidFill>
+            </a:endParaRPr>
+          </a:p>
+        </p:txBody>
+      </p:sp>
+      <p:sp>
+        <p:nvSpPr>
+          <p:cNvPr id="8" name="타원 7">
+            <a:extLst>
+              <a:ext uri="{FF2B5EF4-FFF2-40B4-BE49-F238E27FC236}">
+                <a16:creationId xmlns:a16="http://schemas.microsoft.com/office/drawing/2014/main" id="{03BA5229-7D73-4FBB-9827-7BB1689F1C07}"/>
+              </a:ext>
+            </a:extLst>
+          </p:cNvPr>
+          <p:cNvSpPr/>
+          <p:nvPr/>
+        </p:nvSpPr>
+        <p:spPr>
+          <a:xfrm>
+            <a:off x="5807999" y="2496235"/>
+            <a:ext cx="288000" cy="288000"/>
+          </a:xfrm>
+          <a:prstGeom prst="ellipse">
+            <a:avLst/>
+          </a:prstGeom>
+          <a:solidFill>
+            <a:srgbClr val="FAFAFA">
+              <a:alpha val="50196"/>
+            </a:srgbClr>
+          </a:solidFill>
+          <a:ln>
+            <a:solidFill>
+              <a:srgbClr val="FF0000"/>
+            </a:solidFill>
+          </a:ln>
+        </p:spPr>
+        <p:style>
+          <a:lnRef idx="2">
+            <a:schemeClr val="accent1">
+              <a:shade val="50000"/>
+            </a:schemeClr>
+          </a:lnRef>
+          <a:fillRef idx="1">
+            <a:schemeClr val="accent1"/>
+          </a:fillRef>
+          <a:effectRef idx="0">
+            <a:schemeClr val="accent1"/>
+          </a:effectRef>
+          <a:fontRef idx="minor">
+            <a:schemeClr val="lt1"/>
+          </a:fontRef>
+        </p:style>
+        <p:txBody>
+          <a:bodyPr wrap="none" lIns="0" tIns="0" rIns="0" rtlCol="0" anchor="ctr"/>
+          <a:lstStyle/>
+          <a:p>
+            <a:pPr algn="ctr"/>
+            <a:r>
+              <a:rPr lang="en-US" altLang="ko-KR" sz="1600" b="1" dirty="0">
+                <a:solidFill>
+                  <a:srgbClr val="FF0000"/>
+                </a:solidFill>
+              </a:rPr>
+              <a:t>5</a:t>
+            </a:r>
+            <a:endParaRPr lang="ko-KR" altLang="en-US" sz="1600" b="1" dirty="0">
+              <a:solidFill>
+                <a:srgbClr val="FF0000"/>
+              </a:solidFill>
+            </a:endParaRPr>
+          </a:p>
+        </p:txBody>
+      </p:sp>
+      <p:sp>
+        <p:nvSpPr>
+          <p:cNvPr id="11" name="타원 10">
+            <a:extLst>
+              <a:ext uri="{FF2B5EF4-FFF2-40B4-BE49-F238E27FC236}">
+                <a16:creationId xmlns:a16="http://schemas.microsoft.com/office/drawing/2014/main" id="{2E15C770-EB8A-48C9-82B5-57E29E156609}"/>
+              </a:ext>
+            </a:extLst>
+          </p:cNvPr>
+          <p:cNvSpPr/>
+          <p:nvPr/>
+        </p:nvSpPr>
+        <p:spPr>
+          <a:xfrm>
+            <a:off x="6741449" y="2496235"/>
+            <a:ext cx="288000" cy="288000"/>
+          </a:xfrm>
+          <a:prstGeom prst="ellipse">
+            <a:avLst/>
+          </a:prstGeom>
+          <a:solidFill>
+            <a:srgbClr val="FAFAFA">
+              <a:alpha val="50196"/>
+            </a:srgbClr>
+          </a:solidFill>
+          <a:ln>
+            <a:solidFill>
+              <a:srgbClr val="FF0000"/>
+            </a:solidFill>
+          </a:ln>
+        </p:spPr>
+        <p:style>
+          <a:lnRef idx="2">
+            <a:schemeClr val="accent1">
+              <a:shade val="50000"/>
+            </a:schemeClr>
+          </a:lnRef>
+          <a:fillRef idx="1">
+            <a:schemeClr val="accent1"/>
+          </a:fillRef>
+          <a:effectRef idx="0">
+            <a:schemeClr val="accent1"/>
+          </a:effectRef>
+          <a:fontRef idx="minor">
+            <a:schemeClr val="lt1"/>
+          </a:fontRef>
+        </p:style>
+        <p:txBody>
+          <a:bodyPr wrap="none" lIns="0" tIns="0" rIns="0" rtlCol="0" anchor="ctr"/>
+          <a:lstStyle/>
+          <a:p>
+            <a:pPr algn="ctr"/>
+            <a:r>
+              <a:rPr lang="en-US" altLang="ko-KR" sz="1600" b="1" dirty="0">
+                <a:solidFill>
+                  <a:srgbClr val="FF0000"/>
+                </a:solidFill>
+              </a:rPr>
+              <a:t>6</a:t>
+            </a:r>
+            <a:endParaRPr lang="ko-KR" altLang="en-US" sz="1600" b="1" dirty="0">
+              <a:solidFill>
+                <a:srgbClr val="FF0000"/>
+              </a:solidFill>
+            </a:endParaRPr>
+          </a:p>
+        </p:txBody>
+      </p:sp>
+      <p:sp>
+        <p:nvSpPr>
+          <p:cNvPr id="12" name="타원 11">
+            <a:extLst>
+              <a:ext uri="{FF2B5EF4-FFF2-40B4-BE49-F238E27FC236}">
+                <a16:creationId xmlns:a16="http://schemas.microsoft.com/office/drawing/2014/main" id="{1EA97842-F0A7-4E60-A125-7922654B33D6}"/>
+              </a:ext>
+            </a:extLst>
+          </p:cNvPr>
+          <p:cNvSpPr/>
+          <p:nvPr/>
+        </p:nvSpPr>
+        <p:spPr>
+          <a:xfrm>
+            <a:off x="7779674" y="2784235"/>
+            <a:ext cx="288000" cy="288000"/>
+          </a:xfrm>
+          <a:prstGeom prst="ellipse">
+            <a:avLst/>
+          </a:prstGeom>
+          <a:solidFill>
+            <a:srgbClr val="FAFAFA">
+              <a:alpha val="50196"/>
+            </a:srgbClr>
+          </a:solidFill>
+          <a:ln>
+            <a:solidFill>
+              <a:srgbClr val="FF0000"/>
+            </a:solidFill>
+          </a:ln>
+        </p:spPr>
+        <p:style>
+          <a:lnRef idx="2">
+            <a:schemeClr val="accent1">
+              <a:shade val="50000"/>
+            </a:schemeClr>
+          </a:lnRef>
+          <a:fillRef idx="1">
+            <a:schemeClr val="accent1"/>
+          </a:fillRef>
+          <a:effectRef idx="0">
+            <a:schemeClr val="accent1"/>
+          </a:effectRef>
+          <a:fontRef idx="minor">
+            <a:schemeClr val="lt1"/>
+          </a:fontRef>
+        </p:style>
+        <p:txBody>
+          <a:bodyPr wrap="none" lIns="0" tIns="0" rIns="0" rtlCol="0" anchor="ctr"/>
+          <a:lstStyle/>
+          <a:p>
+            <a:pPr algn="ctr"/>
+            <a:r>
+              <a:rPr lang="en-US" altLang="ko-KR" sz="1600" b="1" dirty="0">
+                <a:solidFill>
+                  <a:srgbClr val="FF0000"/>
+                </a:solidFill>
+              </a:rPr>
+              <a:t>7</a:t>
+            </a:r>
+            <a:endParaRPr lang="ko-KR" altLang="en-US" sz="1600" b="1" dirty="0">
+              <a:solidFill>
+                <a:srgbClr val="FF0000"/>
+              </a:solidFill>
+            </a:endParaRPr>
+          </a:p>
+        </p:txBody>
+      </p:sp>
+      <p:sp>
+        <p:nvSpPr>
+          <p:cNvPr id="13" name="타원 12">
+            <a:extLst>
+              <a:ext uri="{FF2B5EF4-FFF2-40B4-BE49-F238E27FC236}">
+                <a16:creationId xmlns:a16="http://schemas.microsoft.com/office/drawing/2014/main" id="{4AE9D609-E396-4041-AA68-7A5C720CB3CE}"/>
+              </a:ext>
+            </a:extLst>
+          </p:cNvPr>
+          <p:cNvSpPr/>
+          <p:nvPr/>
+        </p:nvSpPr>
+        <p:spPr>
+          <a:xfrm>
+            <a:off x="6741449" y="4073766"/>
+            <a:ext cx="288000" cy="288000"/>
+          </a:xfrm>
+          <a:prstGeom prst="ellipse">
+            <a:avLst/>
+          </a:prstGeom>
+          <a:solidFill>
+            <a:srgbClr val="FAFAFA">
+              <a:alpha val="50196"/>
+            </a:srgbClr>
+          </a:solidFill>
+          <a:ln>
+            <a:solidFill>
+              <a:srgbClr val="FF0000"/>
+            </a:solidFill>
+          </a:ln>
+        </p:spPr>
+        <p:style>
+          <a:lnRef idx="2">
+            <a:schemeClr val="accent1">
+              <a:shade val="50000"/>
+            </a:schemeClr>
+          </a:lnRef>
+          <a:fillRef idx="1">
+            <a:schemeClr val="accent1"/>
+          </a:fillRef>
+          <a:effectRef idx="0">
+            <a:schemeClr val="accent1"/>
+          </a:effectRef>
+          <a:fontRef idx="minor">
+            <a:schemeClr val="lt1"/>
+          </a:fontRef>
+        </p:style>
+        <p:txBody>
+          <a:bodyPr wrap="none" lIns="0" tIns="0" rIns="0" rtlCol="0" anchor="ctr"/>
+          <a:lstStyle/>
+          <a:p>
+            <a:pPr algn="ctr"/>
+            <a:r>
+              <a:rPr lang="en-US" altLang="ko-KR" sz="1600" b="1" dirty="0">
+                <a:solidFill>
+                  <a:srgbClr val="FF0000"/>
+                </a:solidFill>
+              </a:rPr>
+              <a:t>8</a:t>
+            </a:r>
+            <a:endParaRPr lang="ko-KR" altLang="en-US" sz="1600" b="1" dirty="0">
+              <a:solidFill>
+                <a:srgbClr val="FF0000"/>
+              </a:solidFill>
+            </a:endParaRPr>
+          </a:p>
+        </p:txBody>
+      </p:sp>
+    </p:spTree>
+    <p:extLst>
+      <p:ext uri="{BB962C8B-B14F-4D97-AF65-F5344CB8AC3E}">
+        <p14:creationId xmlns:p14="http://schemas.microsoft.com/office/powerpoint/2010/main" val="825589822"/>
+      </p:ext>
+    </p:extLst>
+  </p:cSld>
+  <p:clrMapOvr>
+    <a:masterClrMapping/>
+  </p:clrMapOvr>
+</p:sld>
+</file>
+
+<file path=ppt/slides/slide7.xml><?xml version="1.0" encoding="utf-8"?>
+<p:sld xmlns:a="http://schemas.openxmlformats.org/drawingml/2006/main" xmlns:r="http://schemas.openxmlformats.org/officeDocument/2006/relationships" xmlns:p="http://schemas.openxmlformats.org/presentationml/2006/main">
+  <p:cSld>
+    <p:spTree>
+      <p:nvGrpSpPr>
+        <p:cNvPr id="1" name=""/>
+        <p:cNvGrpSpPr/>
+        <p:nvPr/>
+      </p:nvGrpSpPr>
+      <p:grpSpPr>
+        <a:xfrm>
+          <a:off x="0" y="0"/>
+          <a:ext cx="0" cy="0"/>
+          <a:chOff x="0" y="0"/>
+          <a:chExt cx="0" cy="0"/>
+        </a:xfrm>
+      </p:grpSpPr>
+      <p:pic>
+        <p:nvPicPr>
+          <p:cNvPr id="14" name="그림 13">
+            <a:extLst>
+              <a:ext uri="{FF2B5EF4-FFF2-40B4-BE49-F238E27FC236}">
+                <a16:creationId xmlns:a16="http://schemas.microsoft.com/office/drawing/2014/main" id="{73B621D5-675A-4A64-961C-796A3D5A4CB0}"/>
+              </a:ext>
+            </a:extLst>
+          </p:cNvPr>
+          <p:cNvPicPr>
+            <a:picLocks noChangeAspect="1"/>
+          </p:cNvPicPr>
+          <p:nvPr/>
+        </p:nvPicPr>
+        <p:blipFill>
+          <a:blip r:embed="rId2"/>
+          <a:stretch>
+            <a:fillRect/>
+          </a:stretch>
+        </p:blipFill>
+        <p:spPr>
+          <a:xfrm>
+            <a:off x="1732941" y="1747603"/>
+            <a:ext cx="8726118" cy="3362794"/>
+          </a:xfrm>
+          <a:prstGeom prst="rect">
+            <a:avLst/>
+          </a:prstGeom>
+        </p:spPr>
+      </p:pic>
+      <p:sp>
+        <p:nvSpPr>
+          <p:cNvPr id="4" name="타원 3">
+            <a:extLst>
+              <a:ext uri="{FF2B5EF4-FFF2-40B4-BE49-F238E27FC236}">
+                <a16:creationId xmlns:a16="http://schemas.microsoft.com/office/drawing/2014/main" id="{A1BA4B04-249F-4AE3-83ED-5F2C73B5920C}"/>
+              </a:ext>
+            </a:extLst>
+          </p:cNvPr>
+          <p:cNvSpPr/>
+          <p:nvPr/>
+        </p:nvSpPr>
+        <p:spPr>
+          <a:xfrm>
+            <a:off x="1987477" y="2070519"/>
+            <a:ext cx="288000" cy="288000"/>
+          </a:xfrm>
+          <a:prstGeom prst="ellipse">
+            <a:avLst/>
+          </a:prstGeom>
+          <a:solidFill>
+            <a:srgbClr val="FAFAFA">
+              <a:alpha val="50196"/>
+            </a:srgbClr>
+          </a:solidFill>
+          <a:ln>
+            <a:solidFill>
+              <a:srgbClr val="FF0000"/>
+            </a:solidFill>
+          </a:ln>
+        </p:spPr>
+        <p:style>
+          <a:lnRef idx="2">
+            <a:schemeClr val="accent1">
+              <a:shade val="50000"/>
+            </a:schemeClr>
+          </a:lnRef>
+          <a:fillRef idx="1">
+            <a:schemeClr val="accent1"/>
+          </a:fillRef>
+          <a:effectRef idx="0">
+            <a:schemeClr val="accent1"/>
+          </a:effectRef>
+          <a:fontRef idx="minor">
+            <a:schemeClr val="lt1"/>
+          </a:fontRef>
+        </p:style>
+        <p:txBody>
+          <a:bodyPr wrap="none" lIns="0" tIns="0" rIns="0" rtlCol="0" anchor="ctr"/>
+          <a:lstStyle/>
+          <a:p>
+            <a:pPr algn="ctr"/>
+            <a:r>
+              <a:rPr lang="en-US" altLang="ko-KR" sz="1600" b="1" dirty="0">
+                <a:solidFill>
+                  <a:srgbClr val="FF0000"/>
+                </a:solidFill>
+              </a:rPr>
+              <a:t>1</a:t>
+            </a:r>
+            <a:endParaRPr lang="ko-KR" altLang="en-US" sz="1600" b="1" dirty="0">
+              <a:solidFill>
+                <a:srgbClr val="FF0000"/>
+              </a:solidFill>
+            </a:endParaRPr>
+          </a:p>
+        </p:txBody>
+      </p:sp>
+      <p:sp>
+        <p:nvSpPr>
+          <p:cNvPr id="5" name="타원 4">
+            <a:extLst>
+              <a:ext uri="{FF2B5EF4-FFF2-40B4-BE49-F238E27FC236}">
+                <a16:creationId xmlns:a16="http://schemas.microsoft.com/office/drawing/2014/main" id="{516CF3ED-2B26-45B1-BC89-E488F132C3EB}"/>
+              </a:ext>
+            </a:extLst>
+          </p:cNvPr>
+          <p:cNvSpPr/>
+          <p:nvPr/>
+        </p:nvSpPr>
+        <p:spPr>
+          <a:xfrm>
+            <a:off x="7164576" y="2070519"/>
+            <a:ext cx="288000" cy="288000"/>
+          </a:xfrm>
+          <a:prstGeom prst="ellipse">
+            <a:avLst/>
+          </a:prstGeom>
+          <a:solidFill>
+            <a:srgbClr val="FAFAFA">
+              <a:alpha val="50196"/>
+            </a:srgbClr>
+          </a:solidFill>
+          <a:ln>
+            <a:solidFill>
+              <a:srgbClr val="FF0000"/>
+            </a:solidFill>
+          </a:ln>
+        </p:spPr>
+        <p:style>
+          <a:lnRef idx="2">
+            <a:schemeClr val="accent1">
+              <a:shade val="50000"/>
+            </a:schemeClr>
+          </a:lnRef>
+          <a:fillRef idx="1">
+            <a:schemeClr val="accent1"/>
+          </a:fillRef>
+          <a:effectRef idx="0">
+            <a:schemeClr val="accent1"/>
+          </a:effectRef>
+          <a:fontRef idx="minor">
+            <a:schemeClr val="lt1"/>
+          </a:fontRef>
+        </p:style>
+        <p:txBody>
+          <a:bodyPr wrap="none" lIns="0" tIns="0" rIns="0" rtlCol="0" anchor="ctr"/>
+          <a:lstStyle/>
+          <a:p>
+            <a:pPr algn="ctr"/>
+            <a:r>
+              <a:rPr lang="en-US" altLang="ko-KR" sz="1600" b="1" dirty="0">
+                <a:solidFill>
+                  <a:srgbClr val="FF0000"/>
+                </a:solidFill>
+              </a:rPr>
+              <a:t>2</a:t>
+            </a:r>
+            <a:endParaRPr lang="ko-KR" altLang="en-US" sz="1600" b="1" dirty="0">
+              <a:solidFill>
+                <a:srgbClr val="FF0000"/>
+              </a:solidFill>
+            </a:endParaRPr>
+          </a:p>
+        </p:txBody>
+      </p:sp>
+      <p:sp>
+        <p:nvSpPr>
+          <p:cNvPr id="6" name="타원 5">
+            <a:extLst>
+              <a:ext uri="{FF2B5EF4-FFF2-40B4-BE49-F238E27FC236}">
+                <a16:creationId xmlns:a16="http://schemas.microsoft.com/office/drawing/2014/main" id="{33D87F9B-78F3-4574-833B-40526A8488C3}"/>
+              </a:ext>
+            </a:extLst>
+          </p:cNvPr>
+          <p:cNvSpPr/>
+          <p:nvPr/>
+        </p:nvSpPr>
+        <p:spPr>
+          <a:xfrm>
+            <a:off x="8188252" y="2142659"/>
+            <a:ext cx="288000" cy="288000"/>
+          </a:xfrm>
+          <a:prstGeom prst="ellipse">
+            <a:avLst/>
+          </a:prstGeom>
+          <a:solidFill>
+            <a:srgbClr val="FAFAFA">
+              <a:alpha val="50196"/>
+            </a:srgbClr>
+          </a:solidFill>
+          <a:ln>
+            <a:solidFill>
+              <a:srgbClr val="FF0000"/>
+            </a:solidFill>
+          </a:ln>
+        </p:spPr>
+        <p:style>
+          <a:lnRef idx="2">
+            <a:schemeClr val="accent1">
+              <a:shade val="50000"/>
+            </a:schemeClr>
+          </a:lnRef>
+          <a:fillRef idx="1">
+            <a:schemeClr val="accent1"/>
+          </a:fillRef>
+          <a:effectRef idx="0">
+            <a:schemeClr val="accent1"/>
+          </a:effectRef>
+          <a:fontRef idx="minor">
+            <a:schemeClr val="lt1"/>
+          </a:fontRef>
+        </p:style>
+        <p:txBody>
+          <a:bodyPr wrap="none" lIns="0" tIns="0" rIns="0" rtlCol="0" anchor="ctr"/>
+          <a:lstStyle/>
+          <a:p>
+            <a:pPr algn="ctr"/>
+            <a:r>
+              <a:rPr lang="en-US" altLang="ko-KR" sz="1600" b="1" dirty="0">
+                <a:solidFill>
+                  <a:srgbClr val="FF0000"/>
+                </a:solidFill>
+              </a:rPr>
+              <a:t>3</a:t>
+            </a:r>
+            <a:endParaRPr lang="ko-KR" altLang="en-US" sz="1600" b="1" dirty="0">
+              <a:solidFill>
+                <a:srgbClr val="FF0000"/>
+              </a:solidFill>
+            </a:endParaRPr>
+          </a:p>
+        </p:txBody>
+      </p:sp>
+      <p:sp>
+        <p:nvSpPr>
+          <p:cNvPr id="15" name="타원 14">
+            <a:extLst>
+              <a:ext uri="{FF2B5EF4-FFF2-40B4-BE49-F238E27FC236}">
+                <a16:creationId xmlns:a16="http://schemas.microsoft.com/office/drawing/2014/main" id="{64564DFB-053A-47C2-B4F1-D6ED4B80C69F}"/>
+              </a:ext>
+            </a:extLst>
+          </p:cNvPr>
+          <p:cNvSpPr/>
+          <p:nvPr/>
+        </p:nvSpPr>
+        <p:spPr>
+          <a:xfrm>
+            <a:off x="7676414" y="1998659"/>
+            <a:ext cx="288000" cy="288000"/>
+          </a:xfrm>
+          <a:prstGeom prst="ellipse">
+            <a:avLst/>
+          </a:prstGeom>
+          <a:solidFill>
+            <a:srgbClr val="FAFAFA">
+              <a:alpha val="50196"/>
+            </a:srgbClr>
+          </a:solidFill>
+          <a:ln>
+            <a:solidFill>
+              <a:srgbClr val="FF0000"/>
+            </a:solidFill>
+          </a:ln>
+        </p:spPr>
+        <p:style>
+          <a:lnRef idx="2">
+            <a:schemeClr val="accent1">
+              <a:shade val="50000"/>
+            </a:schemeClr>
+          </a:lnRef>
+          <a:fillRef idx="1">
+            <a:schemeClr val="accent1"/>
+          </a:fillRef>
+          <a:effectRef idx="0">
+            <a:schemeClr val="accent1"/>
+          </a:effectRef>
+          <a:fontRef idx="minor">
+            <a:schemeClr val="lt1"/>
+          </a:fontRef>
+        </p:style>
+        <p:txBody>
+          <a:bodyPr wrap="none" lIns="0" tIns="0" rIns="0" rtlCol="0" anchor="ctr"/>
+          <a:lstStyle/>
+          <a:p>
+            <a:pPr algn="ctr"/>
+            <a:r>
+              <a:rPr lang="en-US" altLang="ko-KR" sz="1600" b="1" dirty="0">
+                <a:solidFill>
+                  <a:srgbClr val="FF0000"/>
+                </a:solidFill>
+              </a:rPr>
+              <a:t>4</a:t>
+            </a:r>
+            <a:endParaRPr lang="ko-KR" altLang="en-US" sz="1600" b="1" dirty="0">
+              <a:solidFill>
+                <a:srgbClr val="FF0000"/>
+              </a:solidFill>
+            </a:endParaRPr>
+          </a:p>
+        </p:txBody>
+      </p:sp>
+      <p:sp>
+        <p:nvSpPr>
+          <p:cNvPr id="16" name="타원 15">
+            <a:extLst>
+              <a:ext uri="{FF2B5EF4-FFF2-40B4-BE49-F238E27FC236}">
+                <a16:creationId xmlns:a16="http://schemas.microsoft.com/office/drawing/2014/main" id="{A04ACB73-A36E-47D6-B2B1-168B387CC3FC}"/>
+              </a:ext>
+            </a:extLst>
+          </p:cNvPr>
+          <p:cNvSpPr/>
+          <p:nvPr/>
+        </p:nvSpPr>
+        <p:spPr>
+          <a:xfrm>
+            <a:off x="1987477" y="3590458"/>
+            <a:ext cx="288000" cy="288000"/>
+          </a:xfrm>
+          <a:prstGeom prst="ellipse">
+            <a:avLst/>
+          </a:prstGeom>
+          <a:solidFill>
+            <a:srgbClr val="FAFAFA">
+              <a:alpha val="50196"/>
+            </a:srgbClr>
+          </a:solidFill>
+          <a:ln>
+            <a:solidFill>
+              <a:srgbClr val="FF0000"/>
+            </a:solidFill>
+          </a:ln>
+        </p:spPr>
+        <p:style>
+          <a:lnRef idx="2">
+            <a:schemeClr val="accent1">
+              <a:shade val="50000"/>
+            </a:schemeClr>
+          </a:lnRef>
+          <a:fillRef idx="1">
+            <a:schemeClr val="accent1"/>
+          </a:fillRef>
+          <a:effectRef idx="0">
+            <a:schemeClr val="accent1"/>
+          </a:effectRef>
+          <a:fontRef idx="minor">
+            <a:schemeClr val="lt1"/>
+          </a:fontRef>
+        </p:style>
+        <p:txBody>
+          <a:bodyPr wrap="none" lIns="0" tIns="0" rIns="0" rtlCol="0" anchor="ctr"/>
+          <a:lstStyle/>
+          <a:p>
+            <a:pPr algn="ctr"/>
+            <a:r>
+              <a:rPr lang="en-US" altLang="ko-KR" sz="1600" b="1" dirty="0">
+                <a:solidFill>
+                  <a:srgbClr val="FF0000"/>
+                </a:solidFill>
+              </a:rPr>
+              <a:t>5</a:t>
+            </a:r>
+            <a:endParaRPr lang="ko-KR" altLang="en-US" sz="1600" b="1" dirty="0">
+              <a:solidFill>
+                <a:srgbClr val="FF0000"/>
+              </a:solidFill>
+            </a:endParaRPr>
+          </a:p>
+        </p:txBody>
+      </p:sp>
+    </p:spTree>
+    <p:extLst>
+      <p:ext uri="{BB962C8B-B14F-4D97-AF65-F5344CB8AC3E}">
+        <p14:creationId xmlns:p14="http://schemas.microsoft.com/office/powerpoint/2010/main" val="399937878"/>
       </p:ext>
     </p:extLst>
   </p:cSld>

--- a/Docs/모으미_moz.A.I.c_기획서 이미지 슬라이드.docx.pptx
+++ b/Docs/모으미_moz.A.I.c_기획서 이미지 슬라이드.docx.pptx
@@ -12,6 +12,7 @@
     <p:sldId id="260" r:id="rId6"/>
     <p:sldId id="261" r:id="rId7"/>
     <p:sldId id="262" r:id="rId8"/>
+    <p:sldId id="263" r:id="rId9"/>
   </p:sldIdLst>
   <p:sldSz cx="12192000" cy="6858000"/>
   <p:notesSz cx="6858000" cy="9144000"/>
@@ -265,7 +266,7 @@
           <a:p>
             <a:fld id="{EDD790CF-EE62-431F-953E-416807FC812B}" type="datetimeFigureOut">
               <a:rPr lang="ko-KR" altLang="en-US" smtClean="0"/>
-              <a:t>2026-03-23</a:t>
+              <a:t>2026-04-07</a:t>
             </a:fld>
             <a:endParaRPr lang="ko-KR" altLang="en-US"/>
           </a:p>
@@ -463,7 +464,7 @@
           <a:p>
             <a:fld id="{EDD790CF-EE62-431F-953E-416807FC812B}" type="datetimeFigureOut">
               <a:rPr lang="ko-KR" altLang="en-US" smtClean="0"/>
-              <a:t>2026-03-23</a:t>
+              <a:t>2026-04-07</a:t>
             </a:fld>
             <a:endParaRPr lang="ko-KR" altLang="en-US"/>
           </a:p>
@@ -671,7 +672,7 @@
           <a:p>
             <a:fld id="{EDD790CF-EE62-431F-953E-416807FC812B}" type="datetimeFigureOut">
               <a:rPr lang="ko-KR" altLang="en-US" smtClean="0"/>
-              <a:t>2026-03-23</a:t>
+              <a:t>2026-04-07</a:t>
             </a:fld>
             <a:endParaRPr lang="ko-KR" altLang="en-US"/>
           </a:p>
@@ -869,7 +870,7 @@
           <a:p>
             <a:fld id="{EDD790CF-EE62-431F-953E-416807FC812B}" type="datetimeFigureOut">
               <a:rPr lang="ko-KR" altLang="en-US" smtClean="0"/>
-              <a:t>2026-03-23</a:t>
+              <a:t>2026-04-07</a:t>
             </a:fld>
             <a:endParaRPr lang="ko-KR" altLang="en-US"/>
           </a:p>
@@ -1144,7 +1145,7 @@
           <a:p>
             <a:fld id="{EDD790CF-EE62-431F-953E-416807FC812B}" type="datetimeFigureOut">
               <a:rPr lang="ko-KR" altLang="en-US" smtClean="0"/>
-              <a:t>2026-03-23</a:t>
+              <a:t>2026-04-07</a:t>
             </a:fld>
             <a:endParaRPr lang="ko-KR" altLang="en-US"/>
           </a:p>
@@ -1409,7 +1410,7 @@
           <a:p>
             <a:fld id="{EDD790CF-EE62-431F-953E-416807FC812B}" type="datetimeFigureOut">
               <a:rPr lang="ko-KR" altLang="en-US" smtClean="0"/>
-              <a:t>2026-03-23</a:t>
+              <a:t>2026-04-07</a:t>
             </a:fld>
             <a:endParaRPr lang="ko-KR" altLang="en-US"/>
           </a:p>
@@ -1821,7 +1822,7 @@
           <a:p>
             <a:fld id="{EDD790CF-EE62-431F-953E-416807FC812B}" type="datetimeFigureOut">
               <a:rPr lang="ko-KR" altLang="en-US" smtClean="0"/>
-              <a:t>2026-03-23</a:t>
+              <a:t>2026-04-07</a:t>
             </a:fld>
             <a:endParaRPr lang="ko-KR" altLang="en-US"/>
           </a:p>
@@ -1962,7 +1963,7 @@
           <a:p>
             <a:fld id="{EDD790CF-EE62-431F-953E-416807FC812B}" type="datetimeFigureOut">
               <a:rPr lang="ko-KR" altLang="en-US" smtClean="0"/>
-              <a:t>2026-03-23</a:t>
+              <a:t>2026-04-07</a:t>
             </a:fld>
             <a:endParaRPr lang="ko-KR" altLang="en-US"/>
           </a:p>
@@ -2075,7 +2076,7 @@
           <a:p>
             <a:fld id="{EDD790CF-EE62-431F-953E-416807FC812B}" type="datetimeFigureOut">
               <a:rPr lang="ko-KR" altLang="en-US" smtClean="0"/>
-              <a:t>2026-03-23</a:t>
+              <a:t>2026-04-07</a:t>
             </a:fld>
             <a:endParaRPr lang="ko-KR" altLang="en-US"/>
           </a:p>
@@ -2386,7 +2387,7 @@
           <a:p>
             <a:fld id="{EDD790CF-EE62-431F-953E-416807FC812B}" type="datetimeFigureOut">
               <a:rPr lang="ko-KR" altLang="en-US" smtClean="0"/>
-              <a:t>2026-03-23</a:t>
+              <a:t>2026-04-07</a:t>
             </a:fld>
             <a:endParaRPr lang="ko-KR" altLang="en-US"/>
           </a:p>
@@ -2674,7 +2675,7 @@
           <a:p>
             <a:fld id="{EDD790CF-EE62-431F-953E-416807FC812B}" type="datetimeFigureOut">
               <a:rPr lang="ko-KR" altLang="en-US" smtClean="0"/>
-              <a:t>2026-03-23</a:t>
+              <a:t>2026-04-07</a:t>
             </a:fld>
             <a:endParaRPr lang="ko-KR" altLang="en-US"/>
           </a:p>
@@ -2915,7 +2916,7 @@
           <a:p>
             <a:fld id="{EDD790CF-EE62-431F-953E-416807FC812B}" type="datetimeFigureOut">
               <a:rPr lang="ko-KR" altLang="en-US" smtClean="0"/>
-              <a:t>2026-03-23</a:t>
+              <a:t>2026-04-07</a:t>
             </a:fld>
             <a:endParaRPr lang="ko-KR" altLang="en-US"/>
           </a:p>
@@ -7721,6 +7722,882 @@
 </p:sld>
 </file>
 
+<file path=ppt/slides/slide8.xml><?xml version="1.0" encoding="utf-8"?>
+<p:sld xmlns:a="http://schemas.openxmlformats.org/drawingml/2006/main" xmlns:r="http://schemas.openxmlformats.org/officeDocument/2006/relationships" xmlns:p="http://schemas.openxmlformats.org/presentationml/2006/main">
+  <p:cSld>
+    <p:spTree>
+      <p:nvGrpSpPr>
+        <p:cNvPr id="1" name=""/>
+        <p:cNvGrpSpPr/>
+        <p:nvPr/>
+      </p:nvGrpSpPr>
+      <p:grpSpPr>
+        <a:xfrm>
+          <a:off x="0" y="0"/>
+          <a:ext cx="0" cy="0"/>
+          <a:chOff x="0" y="0"/>
+          <a:chExt cx="0" cy="0"/>
+        </a:xfrm>
+      </p:grpSpPr>
+      <p:pic>
+        <p:nvPicPr>
+          <p:cNvPr id="3" name="그림 2">
+            <a:extLst>
+              <a:ext uri="{FF2B5EF4-FFF2-40B4-BE49-F238E27FC236}">
+                <a16:creationId xmlns:a16="http://schemas.microsoft.com/office/drawing/2014/main" id="{7336465E-7ED0-4B7E-98B0-EC0A62C294B1}"/>
+              </a:ext>
+            </a:extLst>
+          </p:cNvPr>
+          <p:cNvPicPr>
+            <a:picLocks noChangeAspect="1"/>
+          </p:cNvPicPr>
+          <p:nvPr/>
+        </p:nvPicPr>
+        <p:blipFill>
+          <a:blip r:embed="rId2"/>
+          <a:stretch>
+            <a:fillRect/>
+          </a:stretch>
+        </p:blipFill>
+        <p:spPr>
+          <a:xfrm>
+            <a:off x="851755" y="318653"/>
+            <a:ext cx="10488489" cy="6220693"/>
+          </a:xfrm>
+          <a:prstGeom prst="rect">
+            <a:avLst/>
+          </a:prstGeom>
+        </p:spPr>
+      </p:pic>
+      <p:sp>
+        <p:nvSpPr>
+          <p:cNvPr id="4" name="타원 3">
+            <a:extLst>
+              <a:ext uri="{FF2B5EF4-FFF2-40B4-BE49-F238E27FC236}">
+                <a16:creationId xmlns:a16="http://schemas.microsoft.com/office/drawing/2014/main" id="{6C8BC912-E55D-4E51-9A41-4434256A7246}"/>
+              </a:ext>
+            </a:extLst>
+          </p:cNvPr>
+          <p:cNvSpPr/>
+          <p:nvPr/>
+        </p:nvSpPr>
+        <p:spPr>
+          <a:xfrm>
+            <a:off x="4739145" y="825919"/>
+            <a:ext cx="288000" cy="288000"/>
+          </a:xfrm>
+          <a:prstGeom prst="ellipse">
+            <a:avLst/>
+          </a:prstGeom>
+          <a:solidFill>
+            <a:srgbClr val="FAFAFA">
+              <a:alpha val="50196"/>
+            </a:srgbClr>
+          </a:solidFill>
+          <a:ln>
+            <a:solidFill>
+              <a:srgbClr val="FF0000"/>
+            </a:solidFill>
+          </a:ln>
+        </p:spPr>
+        <p:style>
+          <a:lnRef idx="2">
+            <a:schemeClr val="accent1">
+              <a:shade val="50000"/>
+            </a:schemeClr>
+          </a:lnRef>
+          <a:fillRef idx="1">
+            <a:schemeClr val="accent1"/>
+          </a:fillRef>
+          <a:effectRef idx="0">
+            <a:schemeClr val="accent1"/>
+          </a:effectRef>
+          <a:fontRef idx="minor">
+            <a:schemeClr val="lt1"/>
+          </a:fontRef>
+        </p:style>
+        <p:txBody>
+          <a:bodyPr wrap="none" lIns="0" tIns="0" rIns="0" rtlCol="0" anchor="ctr"/>
+          <a:lstStyle/>
+          <a:p>
+            <a:pPr algn="ctr"/>
+            <a:r>
+              <a:rPr lang="en-US" altLang="ko-KR" sz="1600" b="1" dirty="0">
+                <a:solidFill>
+                  <a:srgbClr val="FF0000"/>
+                </a:solidFill>
+              </a:rPr>
+              <a:t>1</a:t>
+            </a:r>
+            <a:endParaRPr lang="ko-KR" altLang="en-US" sz="1600" b="1" dirty="0">
+              <a:solidFill>
+                <a:srgbClr val="FF0000"/>
+              </a:solidFill>
+            </a:endParaRPr>
+          </a:p>
+        </p:txBody>
+      </p:sp>
+      <p:sp>
+        <p:nvSpPr>
+          <p:cNvPr id="5" name="타원 4">
+            <a:extLst>
+              <a:ext uri="{FF2B5EF4-FFF2-40B4-BE49-F238E27FC236}">
+                <a16:creationId xmlns:a16="http://schemas.microsoft.com/office/drawing/2014/main" id="{8593D713-80F9-4EA3-A3A1-3DE8FC46826A}"/>
+              </a:ext>
+            </a:extLst>
+          </p:cNvPr>
+          <p:cNvSpPr/>
+          <p:nvPr/>
+        </p:nvSpPr>
+        <p:spPr>
+          <a:xfrm>
+            <a:off x="3469145" y="4228732"/>
+            <a:ext cx="288000" cy="288000"/>
+          </a:xfrm>
+          <a:prstGeom prst="ellipse">
+            <a:avLst/>
+          </a:prstGeom>
+          <a:solidFill>
+            <a:srgbClr val="FAFAFA">
+              <a:alpha val="50196"/>
+            </a:srgbClr>
+          </a:solidFill>
+          <a:ln>
+            <a:solidFill>
+              <a:srgbClr val="FF0000"/>
+            </a:solidFill>
+          </a:ln>
+        </p:spPr>
+        <p:style>
+          <a:lnRef idx="2">
+            <a:schemeClr val="accent1">
+              <a:shade val="50000"/>
+            </a:schemeClr>
+          </a:lnRef>
+          <a:fillRef idx="1">
+            <a:schemeClr val="accent1"/>
+          </a:fillRef>
+          <a:effectRef idx="0">
+            <a:schemeClr val="accent1"/>
+          </a:effectRef>
+          <a:fontRef idx="minor">
+            <a:schemeClr val="lt1"/>
+          </a:fontRef>
+        </p:style>
+        <p:txBody>
+          <a:bodyPr wrap="none" lIns="0" tIns="0" rIns="0" rtlCol="0" anchor="ctr"/>
+          <a:lstStyle/>
+          <a:p>
+            <a:pPr algn="ctr"/>
+            <a:r>
+              <a:rPr lang="en-US" altLang="ko-KR" sz="1600" b="1" dirty="0">
+                <a:solidFill>
+                  <a:srgbClr val="FF0000"/>
+                </a:solidFill>
+              </a:rPr>
+              <a:t>5</a:t>
+            </a:r>
+            <a:endParaRPr lang="ko-KR" altLang="en-US" sz="1600" b="1" dirty="0">
+              <a:solidFill>
+                <a:srgbClr val="FF0000"/>
+              </a:solidFill>
+            </a:endParaRPr>
+          </a:p>
+        </p:txBody>
+      </p:sp>
+      <p:sp>
+        <p:nvSpPr>
+          <p:cNvPr id="6" name="타원 5">
+            <a:extLst>
+              <a:ext uri="{FF2B5EF4-FFF2-40B4-BE49-F238E27FC236}">
+                <a16:creationId xmlns:a16="http://schemas.microsoft.com/office/drawing/2014/main" id="{4A0D2943-FA08-4535-AAD8-35D6AA6D7ED1}"/>
+              </a:ext>
+            </a:extLst>
+          </p:cNvPr>
+          <p:cNvSpPr/>
+          <p:nvPr/>
+        </p:nvSpPr>
+        <p:spPr>
+          <a:xfrm>
+            <a:off x="3469145" y="1918119"/>
+            <a:ext cx="288000" cy="288000"/>
+          </a:xfrm>
+          <a:prstGeom prst="ellipse">
+            <a:avLst/>
+          </a:prstGeom>
+          <a:solidFill>
+            <a:srgbClr val="FAFAFA">
+              <a:alpha val="50196"/>
+            </a:srgbClr>
+          </a:solidFill>
+          <a:ln>
+            <a:solidFill>
+              <a:srgbClr val="FF0000"/>
+            </a:solidFill>
+          </a:ln>
+        </p:spPr>
+        <p:style>
+          <a:lnRef idx="2">
+            <a:schemeClr val="accent1">
+              <a:shade val="50000"/>
+            </a:schemeClr>
+          </a:lnRef>
+          <a:fillRef idx="1">
+            <a:schemeClr val="accent1"/>
+          </a:fillRef>
+          <a:effectRef idx="0">
+            <a:schemeClr val="accent1"/>
+          </a:effectRef>
+          <a:fontRef idx="minor">
+            <a:schemeClr val="lt1"/>
+          </a:fontRef>
+        </p:style>
+        <p:txBody>
+          <a:bodyPr wrap="none" lIns="0" tIns="0" rIns="0" rtlCol="0" anchor="ctr"/>
+          <a:lstStyle/>
+          <a:p>
+            <a:pPr algn="ctr"/>
+            <a:r>
+              <a:rPr lang="en-US" altLang="ko-KR" sz="1600" b="1" dirty="0">
+                <a:solidFill>
+                  <a:srgbClr val="FF0000"/>
+                </a:solidFill>
+              </a:rPr>
+              <a:t>4</a:t>
+            </a:r>
+            <a:endParaRPr lang="ko-KR" altLang="en-US" sz="1600" b="1" dirty="0">
+              <a:solidFill>
+                <a:srgbClr val="FF0000"/>
+              </a:solidFill>
+            </a:endParaRPr>
+          </a:p>
+        </p:txBody>
+      </p:sp>
+      <p:sp>
+        <p:nvSpPr>
+          <p:cNvPr id="7" name="타원 6">
+            <a:extLst>
+              <a:ext uri="{FF2B5EF4-FFF2-40B4-BE49-F238E27FC236}">
+                <a16:creationId xmlns:a16="http://schemas.microsoft.com/office/drawing/2014/main" id="{B1A8894A-1F51-4160-A5AA-F3DC812A0E05}"/>
+              </a:ext>
+            </a:extLst>
+          </p:cNvPr>
+          <p:cNvSpPr/>
+          <p:nvPr/>
+        </p:nvSpPr>
+        <p:spPr>
+          <a:xfrm>
+            <a:off x="2895599" y="2713987"/>
+            <a:ext cx="288000" cy="288000"/>
+          </a:xfrm>
+          <a:prstGeom prst="ellipse">
+            <a:avLst/>
+          </a:prstGeom>
+          <a:solidFill>
+            <a:srgbClr val="FAFAFA">
+              <a:alpha val="50196"/>
+            </a:srgbClr>
+          </a:solidFill>
+          <a:ln>
+            <a:solidFill>
+              <a:srgbClr val="FF0000"/>
+            </a:solidFill>
+          </a:ln>
+        </p:spPr>
+        <p:style>
+          <a:lnRef idx="2">
+            <a:schemeClr val="accent1">
+              <a:shade val="50000"/>
+            </a:schemeClr>
+          </a:lnRef>
+          <a:fillRef idx="1">
+            <a:schemeClr val="accent1"/>
+          </a:fillRef>
+          <a:effectRef idx="0">
+            <a:schemeClr val="accent1"/>
+          </a:effectRef>
+          <a:fontRef idx="minor">
+            <a:schemeClr val="lt1"/>
+          </a:fontRef>
+        </p:style>
+        <p:txBody>
+          <a:bodyPr wrap="none" lIns="0" tIns="0" rIns="0" rtlCol="0" anchor="ctr"/>
+          <a:lstStyle/>
+          <a:p>
+            <a:pPr algn="ctr"/>
+            <a:r>
+              <a:rPr lang="en-US" altLang="ko-KR" sz="1600" b="1" dirty="0">
+                <a:solidFill>
+                  <a:srgbClr val="FF0000"/>
+                </a:solidFill>
+              </a:rPr>
+              <a:t>6</a:t>
+            </a:r>
+            <a:endParaRPr lang="ko-KR" altLang="en-US" sz="1600" b="1" dirty="0">
+              <a:solidFill>
+                <a:srgbClr val="FF0000"/>
+              </a:solidFill>
+            </a:endParaRPr>
+          </a:p>
+        </p:txBody>
+      </p:sp>
+      <p:sp>
+        <p:nvSpPr>
+          <p:cNvPr id="8" name="타원 7">
+            <a:extLst>
+              <a:ext uri="{FF2B5EF4-FFF2-40B4-BE49-F238E27FC236}">
+                <a16:creationId xmlns:a16="http://schemas.microsoft.com/office/drawing/2014/main" id="{F1964B96-D9D3-4C07-8937-48F81CC9DBA9}"/>
+              </a:ext>
+            </a:extLst>
+          </p:cNvPr>
+          <p:cNvSpPr/>
+          <p:nvPr/>
+        </p:nvSpPr>
+        <p:spPr>
+          <a:xfrm>
+            <a:off x="2216077" y="1918119"/>
+            <a:ext cx="288000" cy="288000"/>
+          </a:xfrm>
+          <a:prstGeom prst="ellipse">
+            <a:avLst/>
+          </a:prstGeom>
+          <a:solidFill>
+            <a:srgbClr val="FAFAFA">
+              <a:alpha val="50196"/>
+            </a:srgbClr>
+          </a:solidFill>
+          <a:ln>
+            <a:solidFill>
+              <a:srgbClr val="FF0000"/>
+            </a:solidFill>
+          </a:ln>
+        </p:spPr>
+        <p:style>
+          <a:lnRef idx="2">
+            <a:schemeClr val="accent1">
+              <a:shade val="50000"/>
+            </a:schemeClr>
+          </a:lnRef>
+          <a:fillRef idx="1">
+            <a:schemeClr val="accent1"/>
+          </a:fillRef>
+          <a:effectRef idx="0">
+            <a:schemeClr val="accent1"/>
+          </a:effectRef>
+          <a:fontRef idx="minor">
+            <a:schemeClr val="lt1"/>
+          </a:fontRef>
+        </p:style>
+        <p:txBody>
+          <a:bodyPr wrap="none" lIns="0" tIns="0" rIns="0" rtlCol="0" anchor="ctr"/>
+          <a:lstStyle/>
+          <a:p>
+            <a:pPr algn="ctr"/>
+            <a:r>
+              <a:rPr lang="en-US" altLang="ko-KR" sz="1600" b="1" dirty="0">
+                <a:solidFill>
+                  <a:srgbClr val="FF0000"/>
+                </a:solidFill>
+              </a:rPr>
+              <a:t>2</a:t>
+            </a:r>
+            <a:endParaRPr lang="ko-KR" altLang="en-US" sz="1600" b="1" dirty="0">
+              <a:solidFill>
+                <a:srgbClr val="FF0000"/>
+              </a:solidFill>
+            </a:endParaRPr>
+          </a:p>
+        </p:txBody>
+      </p:sp>
+      <p:sp>
+        <p:nvSpPr>
+          <p:cNvPr id="9" name="타원 8">
+            <a:extLst>
+              <a:ext uri="{FF2B5EF4-FFF2-40B4-BE49-F238E27FC236}">
+                <a16:creationId xmlns:a16="http://schemas.microsoft.com/office/drawing/2014/main" id="{75BDC266-43EA-45F6-9F65-C8CC77FDDC3F}"/>
+              </a:ext>
+            </a:extLst>
+          </p:cNvPr>
+          <p:cNvSpPr/>
+          <p:nvPr/>
+        </p:nvSpPr>
+        <p:spPr>
+          <a:xfrm>
+            <a:off x="2216077" y="4228732"/>
+            <a:ext cx="288000" cy="288000"/>
+          </a:xfrm>
+          <a:prstGeom prst="ellipse">
+            <a:avLst/>
+          </a:prstGeom>
+          <a:solidFill>
+            <a:srgbClr val="FAFAFA">
+              <a:alpha val="50196"/>
+            </a:srgbClr>
+          </a:solidFill>
+          <a:ln>
+            <a:solidFill>
+              <a:srgbClr val="FF0000"/>
+            </a:solidFill>
+          </a:ln>
+        </p:spPr>
+        <p:style>
+          <a:lnRef idx="2">
+            <a:schemeClr val="accent1">
+              <a:shade val="50000"/>
+            </a:schemeClr>
+          </a:lnRef>
+          <a:fillRef idx="1">
+            <a:schemeClr val="accent1"/>
+          </a:fillRef>
+          <a:effectRef idx="0">
+            <a:schemeClr val="accent1"/>
+          </a:effectRef>
+          <a:fontRef idx="minor">
+            <a:schemeClr val="lt1"/>
+          </a:fontRef>
+        </p:style>
+        <p:txBody>
+          <a:bodyPr wrap="none" lIns="0" tIns="0" rIns="0" rtlCol="0" anchor="ctr"/>
+          <a:lstStyle/>
+          <a:p>
+            <a:pPr algn="ctr"/>
+            <a:r>
+              <a:rPr lang="en-US" altLang="ko-KR" sz="1600" b="1" dirty="0">
+                <a:solidFill>
+                  <a:srgbClr val="FF0000"/>
+                </a:solidFill>
+              </a:rPr>
+              <a:t>3</a:t>
+            </a:r>
+            <a:endParaRPr lang="ko-KR" altLang="en-US" sz="1600" b="1" dirty="0">
+              <a:solidFill>
+                <a:srgbClr val="FF0000"/>
+              </a:solidFill>
+            </a:endParaRPr>
+          </a:p>
+        </p:txBody>
+      </p:sp>
+      <p:sp>
+        <p:nvSpPr>
+          <p:cNvPr id="10" name="타원 9">
+            <a:extLst>
+              <a:ext uri="{FF2B5EF4-FFF2-40B4-BE49-F238E27FC236}">
+                <a16:creationId xmlns:a16="http://schemas.microsoft.com/office/drawing/2014/main" id="{59D5AD28-1161-4291-940C-BBF9F1DDEF41}"/>
+              </a:ext>
+            </a:extLst>
+          </p:cNvPr>
+          <p:cNvSpPr/>
+          <p:nvPr/>
+        </p:nvSpPr>
+        <p:spPr>
+          <a:xfrm>
+            <a:off x="7476065" y="2713987"/>
+            <a:ext cx="288000" cy="288000"/>
+          </a:xfrm>
+          <a:prstGeom prst="ellipse">
+            <a:avLst/>
+          </a:prstGeom>
+          <a:solidFill>
+            <a:srgbClr val="FAFAFA">
+              <a:alpha val="50196"/>
+            </a:srgbClr>
+          </a:solidFill>
+          <a:ln>
+            <a:solidFill>
+              <a:srgbClr val="FF0000"/>
+            </a:solidFill>
+          </a:ln>
+        </p:spPr>
+        <p:style>
+          <a:lnRef idx="2">
+            <a:schemeClr val="accent1">
+              <a:shade val="50000"/>
+            </a:schemeClr>
+          </a:lnRef>
+          <a:fillRef idx="1">
+            <a:schemeClr val="accent1"/>
+          </a:fillRef>
+          <a:effectRef idx="0">
+            <a:schemeClr val="accent1"/>
+          </a:effectRef>
+          <a:fontRef idx="minor">
+            <a:schemeClr val="lt1"/>
+          </a:fontRef>
+        </p:style>
+        <p:txBody>
+          <a:bodyPr wrap="none" lIns="0" tIns="0" rIns="0" rtlCol="0" anchor="ctr"/>
+          <a:lstStyle/>
+          <a:p>
+            <a:pPr algn="ctr"/>
+            <a:r>
+              <a:rPr lang="en-US" altLang="ko-KR" sz="1600" b="1" dirty="0">
+                <a:solidFill>
+                  <a:srgbClr val="FF0000"/>
+                </a:solidFill>
+              </a:rPr>
+              <a:t>7</a:t>
+            </a:r>
+            <a:endParaRPr lang="ko-KR" altLang="en-US" sz="1600" b="1" dirty="0">
+              <a:solidFill>
+                <a:srgbClr val="FF0000"/>
+              </a:solidFill>
+            </a:endParaRPr>
+          </a:p>
+        </p:txBody>
+      </p:sp>
+      <p:sp>
+        <p:nvSpPr>
+          <p:cNvPr id="11" name="타원 10">
+            <a:extLst>
+              <a:ext uri="{FF2B5EF4-FFF2-40B4-BE49-F238E27FC236}">
+                <a16:creationId xmlns:a16="http://schemas.microsoft.com/office/drawing/2014/main" id="{2A2B522B-99DE-4D46-9517-BD0C4E743FB4}"/>
+              </a:ext>
+            </a:extLst>
+          </p:cNvPr>
+          <p:cNvSpPr/>
+          <p:nvPr/>
+        </p:nvSpPr>
+        <p:spPr>
+          <a:xfrm>
+            <a:off x="2895599" y="3365253"/>
+            <a:ext cx="288000" cy="288000"/>
+          </a:xfrm>
+          <a:prstGeom prst="ellipse">
+            <a:avLst/>
+          </a:prstGeom>
+          <a:solidFill>
+            <a:srgbClr val="FAFAFA">
+              <a:alpha val="50196"/>
+            </a:srgbClr>
+          </a:solidFill>
+          <a:ln>
+            <a:solidFill>
+              <a:srgbClr val="FF0000"/>
+            </a:solidFill>
+          </a:ln>
+        </p:spPr>
+        <p:style>
+          <a:lnRef idx="2">
+            <a:schemeClr val="accent1">
+              <a:shade val="50000"/>
+            </a:schemeClr>
+          </a:lnRef>
+          <a:fillRef idx="1">
+            <a:schemeClr val="accent1"/>
+          </a:fillRef>
+          <a:effectRef idx="0">
+            <a:schemeClr val="accent1"/>
+          </a:effectRef>
+          <a:fontRef idx="minor">
+            <a:schemeClr val="lt1"/>
+          </a:fontRef>
+        </p:style>
+        <p:txBody>
+          <a:bodyPr wrap="none" lIns="0" tIns="0" rIns="0" rtlCol="0" anchor="ctr"/>
+          <a:lstStyle/>
+          <a:p>
+            <a:pPr algn="ctr"/>
+            <a:r>
+              <a:rPr lang="en-US" altLang="ko-KR" sz="1600" b="1" dirty="0">
+                <a:solidFill>
+                  <a:srgbClr val="FF0000"/>
+                </a:solidFill>
+              </a:rPr>
+              <a:t>8</a:t>
+            </a:r>
+            <a:endParaRPr lang="ko-KR" altLang="en-US" sz="1600" b="1" dirty="0">
+              <a:solidFill>
+                <a:srgbClr val="FF0000"/>
+              </a:solidFill>
+            </a:endParaRPr>
+          </a:p>
+        </p:txBody>
+      </p:sp>
+      <p:sp>
+        <p:nvSpPr>
+          <p:cNvPr id="12" name="타원 11">
+            <a:extLst>
+              <a:ext uri="{FF2B5EF4-FFF2-40B4-BE49-F238E27FC236}">
+                <a16:creationId xmlns:a16="http://schemas.microsoft.com/office/drawing/2014/main" id="{85987690-4F2F-4C9D-8F3D-7800E3AEF9CC}"/>
+              </a:ext>
+            </a:extLst>
+          </p:cNvPr>
+          <p:cNvSpPr/>
+          <p:nvPr/>
+        </p:nvSpPr>
+        <p:spPr>
+          <a:xfrm>
+            <a:off x="7476065" y="3365253"/>
+            <a:ext cx="288000" cy="288000"/>
+          </a:xfrm>
+          <a:prstGeom prst="ellipse">
+            <a:avLst/>
+          </a:prstGeom>
+          <a:solidFill>
+            <a:srgbClr val="FAFAFA">
+              <a:alpha val="50196"/>
+            </a:srgbClr>
+          </a:solidFill>
+          <a:ln>
+            <a:solidFill>
+              <a:srgbClr val="FF0000"/>
+            </a:solidFill>
+          </a:ln>
+        </p:spPr>
+        <p:style>
+          <a:lnRef idx="2">
+            <a:schemeClr val="accent1">
+              <a:shade val="50000"/>
+            </a:schemeClr>
+          </a:lnRef>
+          <a:fillRef idx="1">
+            <a:schemeClr val="accent1"/>
+          </a:fillRef>
+          <a:effectRef idx="0">
+            <a:schemeClr val="accent1"/>
+          </a:effectRef>
+          <a:fontRef idx="minor">
+            <a:schemeClr val="lt1"/>
+          </a:fontRef>
+        </p:style>
+        <p:txBody>
+          <a:bodyPr wrap="none" lIns="0" tIns="0" rIns="0" rtlCol="0" anchor="ctr"/>
+          <a:lstStyle/>
+          <a:p>
+            <a:pPr algn="ctr"/>
+            <a:r>
+              <a:rPr lang="en-US" altLang="ko-KR" sz="1600" b="1" dirty="0">
+                <a:solidFill>
+                  <a:srgbClr val="FF0000"/>
+                </a:solidFill>
+              </a:rPr>
+              <a:t>9</a:t>
+            </a:r>
+            <a:endParaRPr lang="ko-KR" altLang="en-US" sz="1600" b="1" dirty="0">
+              <a:solidFill>
+                <a:srgbClr val="FF0000"/>
+              </a:solidFill>
+            </a:endParaRPr>
+          </a:p>
+        </p:txBody>
+      </p:sp>
+      <p:sp>
+        <p:nvSpPr>
+          <p:cNvPr id="13" name="타원 12">
+            <a:extLst>
+              <a:ext uri="{FF2B5EF4-FFF2-40B4-BE49-F238E27FC236}">
+                <a16:creationId xmlns:a16="http://schemas.microsoft.com/office/drawing/2014/main" id="{6CF7FFED-C1FD-4D74-BE37-762B710BE20D}"/>
+              </a:ext>
+            </a:extLst>
+          </p:cNvPr>
+          <p:cNvSpPr/>
+          <p:nvPr/>
+        </p:nvSpPr>
+        <p:spPr>
+          <a:xfrm>
+            <a:off x="1498598" y="5304120"/>
+            <a:ext cx="288000" cy="288000"/>
+          </a:xfrm>
+          <a:prstGeom prst="ellipse">
+            <a:avLst/>
+          </a:prstGeom>
+          <a:solidFill>
+            <a:srgbClr val="FAFAFA">
+              <a:alpha val="50196"/>
+            </a:srgbClr>
+          </a:solidFill>
+          <a:ln>
+            <a:solidFill>
+              <a:srgbClr val="FF0000"/>
+            </a:solidFill>
+          </a:ln>
+        </p:spPr>
+        <p:style>
+          <a:lnRef idx="2">
+            <a:schemeClr val="accent1">
+              <a:shade val="50000"/>
+            </a:schemeClr>
+          </a:lnRef>
+          <a:fillRef idx="1">
+            <a:schemeClr val="accent1"/>
+          </a:fillRef>
+          <a:effectRef idx="0">
+            <a:schemeClr val="accent1"/>
+          </a:effectRef>
+          <a:fontRef idx="minor">
+            <a:schemeClr val="lt1"/>
+          </a:fontRef>
+        </p:style>
+        <p:txBody>
+          <a:bodyPr wrap="none" lIns="0" tIns="0" rIns="0" rtlCol="0" anchor="ctr"/>
+          <a:lstStyle/>
+          <a:p>
+            <a:pPr algn="ctr"/>
+            <a:r>
+              <a:rPr lang="en-US" altLang="ko-KR" sz="1600" b="1" dirty="0">
+                <a:solidFill>
+                  <a:srgbClr val="FF0000"/>
+                </a:solidFill>
+              </a:rPr>
+              <a:t>10</a:t>
+            </a:r>
+            <a:endParaRPr lang="ko-KR" altLang="en-US" sz="1600" b="1" dirty="0">
+              <a:solidFill>
+                <a:srgbClr val="FF0000"/>
+              </a:solidFill>
+            </a:endParaRPr>
+          </a:p>
+        </p:txBody>
+      </p:sp>
+      <p:sp>
+        <p:nvSpPr>
+          <p:cNvPr id="14" name="타원 13">
+            <a:extLst>
+              <a:ext uri="{FF2B5EF4-FFF2-40B4-BE49-F238E27FC236}">
+                <a16:creationId xmlns:a16="http://schemas.microsoft.com/office/drawing/2014/main" id="{C475E363-ABF5-406F-AC98-C1495590D539}"/>
+              </a:ext>
+            </a:extLst>
+          </p:cNvPr>
+          <p:cNvSpPr/>
+          <p:nvPr/>
+        </p:nvSpPr>
+        <p:spPr>
+          <a:xfrm>
+            <a:off x="7315196" y="5304120"/>
+            <a:ext cx="288000" cy="288000"/>
+          </a:xfrm>
+          <a:prstGeom prst="ellipse">
+            <a:avLst/>
+          </a:prstGeom>
+          <a:solidFill>
+            <a:srgbClr val="FAFAFA">
+              <a:alpha val="50196"/>
+            </a:srgbClr>
+          </a:solidFill>
+          <a:ln>
+            <a:solidFill>
+              <a:srgbClr val="FF0000"/>
+            </a:solidFill>
+          </a:ln>
+        </p:spPr>
+        <p:style>
+          <a:lnRef idx="2">
+            <a:schemeClr val="accent1">
+              <a:shade val="50000"/>
+            </a:schemeClr>
+          </a:lnRef>
+          <a:fillRef idx="1">
+            <a:schemeClr val="accent1"/>
+          </a:fillRef>
+          <a:effectRef idx="0">
+            <a:schemeClr val="accent1"/>
+          </a:effectRef>
+          <a:fontRef idx="minor">
+            <a:schemeClr val="lt1"/>
+          </a:fontRef>
+        </p:style>
+        <p:txBody>
+          <a:bodyPr wrap="none" lIns="0" tIns="0" rIns="0" rtlCol="0" anchor="ctr"/>
+          <a:lstStyle/>
+          <a:p>
+            <a:pPr algn="ctr"/>
+            <a:r>
+              <a:rPr lang="en-US" altLang="ko-KR" sz="1600" b="1" dirty="0">
+                <a:solidFill>
+                  <a:srgbClr val="FF0000"/>
+                </a:solidFill>
+              </a:rPr>
+              <a:t>11</a:t>
+            </a:r>
+            <a:endParaRPr lang="ko-KR" altLang="en-US" sz="1600" b="1" dirty="0">
+              <a:solidFill>
+                <a:srgbClr val="FF0000"/>
+              </a:solidFill>
+            </a:endParaRPr>
+          </a:p>
+        </p:txBody>
+      </p:sp>
+      <p:sp>
+        <p:nvSpPr>
+          <p:cNvPr id="15" name="타원 14">
+            <a:extLst>
+              <a:ext uri="{FF2B5EF4-FFF2-40B4-BE49-F238E27FC236}">
+                <a16:creationId xmlns:a16="http://schemas.microsoft.com/office/drawing/2014/main" id="{B7F611E0-E43B-4C47-9685-C20EBDEF220B}"/>
+              </a:ext>
+            </a:extLst>
+          </p:cNvPr>
+          <p:cNvSpPr/>
+          <p:nvPr/>
+        </p:nvSpPr>
+        <p:spPr>
+          <a:xfrm>
+            <a:off x="10320863" y="829452"/>
+            <a:ext cx="288000" cy="288000"/>
+          </a:xfrm>
+          <a:prstGeom prst="ellipse">
+            <a:avLst/>
+          </a:prstGeom>
+          <a:solidFill>
+            <a:srgbClr val="FAFAFA">
+              <a:alpha val="50196"/>
+            </a:srgbClr>
+          </a:solidFill>
+          <a:ln>
+            <a:solidFill>
+              <a:srgbClr val="FF0000"/>
+            </a:solidFill>
+          </a:ln>
+        </p:spPr>
+        <p:style>
+          <a:lnRef idx="2">
+            <a:schemeClr val="accent1">
+              <a:shade val="50000"/>
+            </a:schemeClr>
+          </a:lnRef>
+          <a:fillRef idx="1">
+            <a:schemeClr val="accent1"/>
+          </a:fillRef>
+          <a:effectRef idx="0">
+            <a:schemeClr val="accent1"/>
+          </a:effectRef>
+          <a:fontRef idx="minor">
+            <a:schemeClr val="lt1"/>
+          </a:fontRef>
+        </p:style>
+        <p:txBody>
+          <a:bodyPr wrap="none" lIns="0" tIns="0" rIns="0" rtlCol="0" anchor="ctr"/>
+          <a:lstStyle/>
+          <a:p>
+            <a:pPr algn="ctr"/>
+            <a:r>
+              <a:rPr lang="en-US" altLang="ko-KR" sz="1600" b="1" dirty="0">
+                <a:solidFill>
+                  <a:srgbClr val="FF0000"/>
+                </a:solidFill>
+              </a:rPr>
+              <a:t>12</a:t>
+            </a:r>
+            <a:endParaRPr lang="ko-KR" altLang="en-US" sz="1600" b="1" dirty="0">
+              <a:solidFill>
+                <a:srgbClr val="FF0000"/>
+              </a:solidFill>
+            </a:endParaRPr>
+          </a:p>
+        </p:txBody>
+      </p:sp>
+    </p:spTree>
+    <p:extLst>
+      <p:ext uri="{BB962C8B-B14F-4D97-AF65-F5344CB8AC3E}">
+        <p14:creationId xmlns:p14="http://schemas.microsoft.com/office/powerpoint/2010/main" val="568631263"/>
+      </p:ext>
+    </p:extLst>
+  </p:cSld>
+  <p:clrMapOvr>
+    <a:masterClrMapping/>
+  </p:clrMapOvr>
+</p:sld>
+</file>
+
 <file path=ppt/theme/theme1.xml><?xml version="1.0" encoding="utf-8"?>
 <a:theme xmlns:a="http://schemas.openxmlformats.org/drawingml/2006/main" name="Office 테마">
   <a:themeElements>
